--- a/harness/out/pptx/pitch_deck_reorder/cold/deck.pptx
+++ b/harness/out/pptx/pitch_deck_reorder/cold/deck.pptx
@@ -3107,7 +3107,7 @@
             <a:avLst/>
           </a:prstGeom>
           <a:solidFill>
-            <a:srgbClr val="12161C"/>
+            <a:srgbClr val="FAF8F5"/>
           </a:solidFill>
           <a:ln>
             <a:noFill/>
@@ -3138,20 +3138,62 @@
       </p:sp>
       <p:sp>
         <p:nvSpPr>
-          <p:cNvPr id="3" name="Rectangle 2"/>
+          <p:cNvPr id="3" name="TextBox 2"/>
+          <p:cNvSpPr txBox="1"/>
+          <p:nvPr/>
+        </p:nvSpPr>
+        <p:spPr>
+          <a:xfrm>
+            <a:off x="822960" y="2331720"/>
+            <a:ext cx="10545775" cy="1188720"/>
+          </a:xfrm>
+          <a:prstGeom prst="rect">
+            <a:avLst/>
+          </a:prstGeom>
+          <a:noFill/>
+        </p:spPr>
+        <p:txBody>
+          <a:bodyPr wrap="square" anchor="t" lIns="0" rIns="0" tIns="0" bIns="0">
+            <a:spAutoFit/>
+          </a:bodyPr>
+          <a:lstStyle/>
+          <a:p>
+            <a:pPr algn="ctr">
+              <a:spcBef>
+                <a:spcPts val="0"/>
+              </a:spcBef>
+              <a:spcAft>
+                <a:spcPts val="0"/>
+              </a:spcAft>
+            </a:pPr>
+            <a:r>
+              <a:rPr sz="6200" b="1">
+                <a:solidFill>
+                  <a:srgbClr val="1C1B19"/>
+                </a:solidFill>
+                <a:latin typeface="Arial"/>
+              </a:rPr>
+              <a:t>Marrow</a:t>
+            </a:r>
+          </a:p>
+        </p:txBody>
+      </p:sp>
+      <p:sp>
+        <p:nvSpPr>
+          <p:cNvPr id="4" name="Rectangle 3"/>
           <p:cNvSpPr/>
           <p:nvPr/>
         </p:nvSpPr>
         <p:spPr>
           <a:xfrm>
-            <a:off x="914400" y="2331720"/>
-            <a:ext cx="1280160" cy="109728"/>
+            <a:off x="5181447" y="3611880"/>
+            <a:ext cx="1828800" cy="41148"/>
           </a:xfrm>
           <a:prstGeom prst="rect">
             <a:avLst/>
           </a:prstGeom>
           <a:solidFill>
-            <a:srgbClr val="F26B3A"/>
+            <a:srgbClr val="C2472F"/>
           </a:solidFill>
           <a:ln>
             <a:noFill/>
@@ -3182,14 +3224,14 @@
       </p:sp>
       <p:sp>
         <p:nvSpPr>
-          <p:cNvPr id="4" name="TextBox 3"/>
+          <p:cNvPr id="5" name="TextBox 4"/>
           <p:cNvSpPr txBox="1"/>
           <p:nvPr/>
         </p:nvSpPr>
         <p:spPr>
           <a:xfrm>
-            <a:off x="914400" y="2514600"/>
-            <a:ext cx="10332720" cy="2194560"/>
+            <a:off x="822960" y="3977639"/>
+            <a:ext cx="10545775" cy="640080"/>
           </a:xfrm>
           <a:prstGeom prst="rect">
             <a:avLst/>
@@ -3202,31 +3244,64 @@
           </a:bodyPr>
           <a:lstStyle/>
           <a:p>
-            <a:pPr algn="l"/>
-            <a:r>
-              <a:rPr sz="8800" b="1">
+            <a:pPr algn="ctr">
+              <a:spcBef>
+                <a:spcPts val="0"/>
+              </a:spcBef>
+              <a:spcAft>
+                <a:spcPts val="0"/>
+              </a:spcAft>
+            </a:pPr>
+            <a:r>
+              <a:rPr sz="2200" b="0">
                 <a:solidFill>
-                  <a:srgbClr val="E8ECF1"/>
-                </a:solidFill>
-                <a:latin typeface="Arial"/>
-              </a:rPr>
-              <a:t>Marrow</a:t>
-            </a:r>
-          </a:p>
-          <a:p>
-            <a:pPr algn="l">
-              <a:spcBef>
-                <a:spcPts val="1400"/>
-              </a:spcBef>
-            </a:pPr>
-            <a:r>
-              <a:rPr sz="3000" b="0">
-                <a:solidFill>
-                  <a:srgbClr val="9AA6B2"/>
+                  <a:srgbClr val="6B665F"/>
                 </a:solidFill>
                 <a:latin typeface="Arial"/>
               </a:rPr>
               <a:t>Know what your tests actually cover.</a:t>
+            </a:r>
+          </a:p>
+        </p:txBody>
+      </p:sp>
+      <p:sp>
+        <p:nvSpPr>
+          <p:cNvPr id="6" name="TextBox 5"/>
+          <p:cNvSpPr txBox="1"/>
+          <p:nvPr/>
+        </p:nvSpPr>
+        <p:spPr>
+          <a:xfrm>
+            <a:off x="822960" y="6053328"/>
+            <a:ext cx="10545775" cy="365760"/>
+          </a:xfrm>
+          <a:prstGeom prst="rect">
+            <a:avLst/>
+          </a:prstGeom>
+          <a:noFill/>
+        </p:spPr>
+        <p:txBody>
+          <a:bodyPr wrap="square" anchor="t" lIns="0" rIns="0" tIns="0" bIns="0">
+            <a:spAutoFit/>
+          </a:bodyPr>
+          <a:lstStyle/>
+          <a:p>
+            <a:pPr algn="ctr">
+              <a:spcBef>
+                <a:spcPts val="0"/>
+              </a:spcBef>
+              <a:spcAft>
+                <a:spcPts val="0"/>
+              </a:spcAft>
+            </a:pPr>
+            <a:r>
+              <a:rPr sz="1000" b="0">
+                <a:solidFill>
+                  <a:srgbClr val="6B665F"/>
+                </a:solidFill>
+                <a:latin typeface="Arial"/>
+              </a:rPr>
+              <a:t>A CLI that maps a repo's tests to the code they actually cover.</a:t>
             </a:r>
           </a:p>
         </p:txBody>
@@ -3264,7 +3339,7 @@
             <a:avLst/>
           </a:prstGeom>
           <a:solidFill>
-            <a:srgbClr val="12161C"/>
+            <a:srgbClr val="FAF8F5"/>
           </a:solidFill>
           <a:ln>
             <a:noFill/>
@@ -3295,20 +3370,65 @@
       </p:sp>
       <p:sp>
         <p:nvSpPr>
-          <p:cNvPr id="3" name="Rectangle 2"/>
+          <p:cNvPr id="3" name="TextBox 2"/>
+          <p:cNvSpPr txBox="1"/>
+          <p:nvPr/>
+        </p:nvSpPr>
+        <p:spPr>
+          <a:xfrm>
+            <a:off x="822960" y="777240"/>
+            <a:ext cx="10545775" cy="1234440"/>
+          </a:xfrm>
+          <a:prstGeom prst="rect">
+            <a:avLst/>
+          </a:prstGeom>
+          <a:noFill/>
+        </p:spPr>
+        <p:txBody>
+          <a:bodyPr wrap="square" anchor="t" lIns="0" rIns="0" tIns="0" bIns="0">
+            <a:spAutoFit/>
+          </a:bodyPr>
+          <a:lstStyle/>
+          <a:p>
+            <a:pPr algn="ctr">
+              <a:lnSpc>
+                <a:spcPct val="110000"/>
+              </a:lnSpc>
+              <a:spcBef>
+                <a:spcPts val="0"/>
+              </a:spcBef>
+              <a:spcAft>
+                <a:spcPts val="0"/>
+              </a:spcAft>
+            </a:pPr>
+            <a:r>
+              <a:rPr sz="3400" b="1">
+                <a:solidFill>
+                  <a:srgbClr val="1C1B19"/>
+                </a:solidFill>
+                <a:latin typeface="Arial"/>
+              </a:rPr>
+              <a:t>Big test suites hide their gaps.</a:t>
+            </a:r>
+          </a:p>
+        </p:txBody>
+      </p:sp>
+      <p:sp>
+        <p:nvSpPr>
+          <p:cNvPr id="4" name="Rectangle 3"/>
           <p:cNvSpPr/>
           <p:nvPr/>
         </p:nvSpPr>
         <p:spPr>
           <a:xfrm>
-            <a:off x="914400" y="1005840"/>
-            <a:ext cx="822960" cy="82296"/>
+            <a:off x="5410047" y="2084831"/>
+            <a:ext cx="1371600" cy="41148"/>
           </a:xfrm>
           <a:prstGeom prst="rect">
             <a:avLst/>
           </a:prstGeom>
           <a:solidFill>
-            <a:srgbClr val="F26B3A"/>
+            <a:srgbClr val="C2472F"/>
           </a:solidFill>
           <a:ln>
             <a:noFill/>
@@ -3339,14 +3459,14 @@
       </p:sp>
       <p:sp>
         <p:nvSpPr>
-          <p:cNvPr id="4" name="TextBox 3"/>
+          <p:cNvPr id="5" name="TextBox 4"/>
           <p:cNvSpPr txBox="1"/>
           <p:nvPr/>
         </p:nvSpPr>
         <p:spPr>
           <a:xfrm>
-            <a:off x="914400" y="1325880"/>
-            <a:ext cx="10332720" cy="1280160"/>
+            <a:off x="1798167" y="2788920"/>
+            <a:ext cx="8595360" cy="2377440"/>
           </a:xfrm>
           <a:prstGeom prst="rect">
             <a:avLst/>
@@ -3359,29 +3479,101 @@
           </a:bodyPr>
           <a:lstStyle/>
           <a:p>
-            <a:pPr algn="l"/>
-            <a:r>
-              <a:rPr sz="4400" b="1">
+            <a:pPr algn="l">
+              <a:lnSpc>
+                <a:spcPct val="130000"/>
+              </a:lnSpc>
+              <a:spcAft>
+                <a:spcPts val="1600"/>
+              </a:spcAft>
+            </a:pPr>
+            <a:r>
+              <a:rPr sz="1800" b="1">
                 <a:solidFill>
-                  <a:srgbClr val="E8ECF1"/>
+                  <a:srgbClr val="C2472F"/>
                 </a:solidFill>
                 <a:latin typeface="Arial"/>
               </a:rPr>
-              <a:t>Big test suites hide their gaps.</a:t>
-            </a:r>
-          </a:p>
-        </p:txBody>
-      </p:sp>
-      <p:sp>
-        <p:nvSpPr>
-          <p:cNvPr id="5" name="TextBox 4"/>
+              <a:t>•   </a:t>
+            </a:r>
+            <a:r>
+              <a:rPr sz="1800">
+                <a:solidFill>
+                  <a:srgbClr val="1C1B19"/>
+                </a:solidFill>
+                <a:latin typeface="Arial"/>
+              </a:rPr>
+              <a:t>Large suites are slow — a full run is a coffee break, not a feedback loop.</a:t>
+            </a:r>
+          </a:p>
+          <a:p>
+            <a:pPr algn="l">
+              <a:lnSpc>
+                <a:spcPct val="130000"/>
+              </a:lnSpc>
+              <a:spcAft>
+                <a:spcPts val="1600"/>
+              </a:spcAft>
+            </a:pPr>
+            <a:r>
+              <a:rPr sz="1800" b="1">
+                <a:solidFill>
+                  <a:srgbClr val="C2472F"/>
+                </a:solidFill>
+                <a:latin typeface="Arial"/>
+              </a:rPr>
+              <a:t>•   </a:t>
+            </a:r>
+            <a:r>
+              <a:rPr sz="1800">
+                <a:solidFill>
+                  <a:srgbClr val="1C1B19"/>
+                </a:solidFill>
+                <a:latin typeface="Arial"/>
+              </a:rPr>
+              <a:t>Nobody knows which tests cover which code.</a:t>
+            </a:r>
+          </a:p>
+          <a:p>
+            <a:pPr algn="l">
+              <a:lnSpc>
+                <a:spcPct val="130000"/>
+              </a:lnSpc>
+              <a:spcAft>
+                <a:spcPts val="1600"/>
+              </a:spcAft>
+            </a:pPr>
+            <a:r>
+              <a:rPr sz="1800" b="1">
+                <a:solidFill>
+                  <a:srgbClr val="C2472F"/>
+                </a:solidFill>
+                <a:latin typeface="Arial"/>
+              </a:rPr>
+              <a:t>•   </a:t>
+            </a:r>
+            <a:r>
+              <a:rPr sz="1800">
+                <a:solidFill>
+                  <a:srgbClr val="1C1B19"/>
+                </a:solidFill>
+                <a:latin typeface="Arial"/>
+              </a:rPr>
+              <a:t>So dead tests linger, and real gaps go unnoticed.</a:t>
+            </a:r>
+          </a:p>
+        </p:txBody>
+      </p:sp>
+      <p:sp>
+        <p:nvSpPr>
+          <p:cNvPr id="6" name="TextBox 5"/>
           <p:cNvSpPr txBox="1"/>
           <p:nvPr/>
         </p:nvSpPr>
         <p:spPr>
           <a:xfrm>
-            <a:off x="914400" y="2926080"/>
-            <a:ext cx="9875520" cy="2743200"/>
+            <a:off x="822960" y="6144768"/>
+            <a:ext cx="2743200" cy="274320"/>
           </a:xfrm>
           <a:prstGeom prst="rect">
             <a:avLst/>
@@ -3395,77 +3587,63 @@
           <a:lstStyle/>
           <a:p>
             <a:pPr algn="l">
+              <a:spcBef>
+                <a:spcPts val="0"/>
+              </a:spcBef>
               <a:spcAft>
-                <a:spcPts val="1600"/>
+                <a:spcPts val="0"/>
               </a:spcAft>
             </a:pPr>
             <a:r>
-              <a:rPr sz="2600" b="1">
+              <a:rPr sz="1000" b="0">
                 <a:solidFill>
-                  <a:srgbClr val="F26B3A"/>
+                  <a:srgbClr val="6B665F"/>
                 </a:solidFill>
                 <a:latin typeface="Arial"/>
               </a:rPr>
-              <a:t>—  </a:t>
-            </a:r>
-            <a:r>
-              <a:rPr sz="2600">
+              <a:t>Marrow</a:t>
+            </a:r>
+          </a:p>
+        </p:txBody>
+      </p:sp>
+      <p:sp>
+        <p:nvSpPr>
+          <p:cNvPr id="7" name="TextBox 6"/>
+          <p:cNvSpPr txBox="1"/>
+          <p:nvPr/>
+        </p:nvSpPr>
+        <p:spPr>
+          <a:xfrm>
+            <a:off x="8625535" y="6144768"/>
+            <a:ext cx="2743200" cy="274320"/>
+          </a:xfrm>
+          <a:prstGeom prst="rect">
+            <a:avLst/>
+          </a:prstGeom>
+          <a:noFill/>
+        </p:spPr>
+        <p:txBody>
+          <a:bodyPr wrap="square" anchor="t" lIns="0" rIns="0" tIns="0" bIns="0">
+            <a:spAutoFit/>
+          </a:bodyPr>
+          <a:lstStyle/>
+          <a:p>
+            <a:pPr algn="r">
+              <a:spcBef>
+                <a:spcPts val="0"/>
+              </a:spcBef>
+              <a:spcAft>
+                <a:spcPts val="0"/>
+              </a:spcAft>
+            </a:pPr>
+            <a:r>
+              <a:rPr sz="1000" b="0">
                 <a:solidFill>
-                  <a:srgbClr val="E8ECF1"/>
+                  <a:srgbClr val="6B665F"/>
                 </a:solidFill>
                 <a:latin typeface="Arial"/>
               </a:rPr>
-              <a:t>Large suites are slow to run.</a:t>
-            </a:r>
-          </a:p>
-          <a:p>
-            <a:pPr algn="l">
-              <a:spcAft>
-                <a:spcPts val="1600"/>
-              </a:spcAft>
-            </a:pPr>
-            <a:r>
-              <a:rPr sz="2600" b="1">
-                <a:solidFill>
-                  <a:srgbClr val="F26B3A"/>
-                </a:solidFill>
-                <a:latin typeface="Arial"/>
-              </a:rPr>
-              <a:t>—  </a:t>
-            </a:r>
-            <a:r>
-              <a:rPr sz="2600">
-                <a:solidFill>
-                  <a:srgbClr val="E8ECF1"/>
-                </a:solidFill>
-                <a:latin typeface="Arial"/>
-              </a:rPr>
-              <a:t>Nobody knows which tests cover which code.</a:t>
-            </a:r>
-          </a:p>
-          <a:p>
-            <a:pPr algn="l">
-              <a:spcAft>
-                <a:spcPts val="1600"/>
-              </a:spcAft>
-            </a:pPr>
-            <a:r>
-              <a:rPr sz="2600" b="1">
-                <a:solidFill>
-                  <a:srgbClr val="F26B3A"/>
-                </a:solidFill>
-                <a:latin typeface="Arial"/>
-              </a:rPr>
-              <a:t>—  </a:t>
-            </a:r>
-            <a:r>
-              <a:rPr sz="2600">
-                <a:solidFill>
-                  <a:srgbClr val="E8ECF1"/>
-                </a:solidFill>
-                <a:latin typeface="Arial"/>
-              </a:rPr>
-              <a:t>Dead tests linger, and real gaps go unnoticed.</a:t>
+              <a:t>2</a:t>
             </a:r>
           </a:p>
         </p:txBody>
@@ -3503,7 +3681,7 @@
             <a:avLst/>
           </a:prstGeom>
           <a:solidFill>
-            <a:srgbClr val="12161C"/>
+            <a:srgbClr val="FAF8F5"/>
           </a:solidFill>
           <a:ln>
             <a:noFill/>
@@ -3534,20 +3712,65 @@
       </p:sp>
       <p:sp>
         <p:nvSpPr>
-          <p:cNvPr id="3" name="Rectangle 2"/>
+          <p:cNvPr id="3" name="TextBox 2"/>
+          <p:cNvSpPr txBox="1"/>
+          <p:nvPr/>
+        </p:nvSpPr>
+        <p:spPr>
+          <a:xfrm>
+            <a:off x="822960" y="777240"/>
+            <a:ext cx="10545775" cy="1234440"/>
+          </a:xfrm>
+          <a:prstGeom prst="rect">
+            <a:avLst/>
+          </a:prstGeom>
+          <a:noFill/>
+        </p:spPr>
+        <p:txBody>
+          <a:bodyPr wrap="square" anchor="t" lIns="0" rIns="0" tIns="0" bIns="0">
+            <a:spAutoFit/>
+          </a:bodyPr>
+          <a:lstStyle/>
+          <a:p>
+            <a:pPr algn="ctr">
+              <a:lnSpc>
+                <a:spcPct val="110000"/>
+              </a:lnSpc>
+              <a:spcBef>
+                <a:spcPts val="0"/>
+              </a:spcBef>
+              <a:spcAft>
+                <a:spcPts val="0"/>
+              </a:spcAft>
+            </a:pPr>
+            <a:r>
+              <a:rPr sz="3400" b="1">
+                <a:solidFill>
+                  <a:srgbClr val="1C1B19"/>
+                </a:solidFill>
+                <a:latin typeface="Arial"/>
+              </a:rPr>
+              <a:t>Watch one run. Draw the real map.</a:t>
+            </a:r>
+          </a:p>
+        </p:txBody>
+      </p:sp>
+      <p:sp>
+        <p:nvSpPr>
+          <p:cNvPr id="4" name="Rectangle 3"/>
           <p:cNvSpPr/>
           <p:nvPr/>
         </p:nvSpPr>
         <p:spPr>
           <a:xfrm>
-            <a:off x="914400" y="1005840"/>
-            <a:ext cx="822960" cy="82296"/>
+            <a:off x="5410047" y="2084831"/>
+            <a:ext cx="1371600" cy="41148"/>
           </a:xfrm>
           <a:prstGeom prst="rect">
             <a:avLst/>
           </a:prstGeom>
           <a:solidFill>
-            <a:srgbClr val="F26B3A"/>
+            <a:srgbClr val="C2472F"/>
           </a:solidFill>
           <a:ln>
             <a:noFill/>
@@ -3578,14 +3801,14 @@
       </p:sp>
       <p:sp>
         <p:nvSpPr>
-          <p:cNvPr id="4" name="TextBox 3"/>
+          <p:cNvPr id="5" name="TextBox 4"/>
           <p:cNvSpPr txBox="1"/>
           <p:nvPr/>
         </p:nvSpPr>
         <p:spPr>
           <a:xfrm>
-            <a:off x="914400" y="1325880"/>
-            <a:ext cx="10332720" cy="2011680"/>
+            <a:off x="1920240" y="2834640"/>
+            <a:ext cx="8351215" cy="1463040"/>
           </a:xfrm>
           <a:prstGeom prst="rect">
             <a:avLst/>
@@ -3598,41 +3821,39 @@
           </a:bodyPr>
           <a:lstStyle/>
           <a:p>
-            <a:pPr algn="l"/>
-            <a:r>
-              <a:rPr sz="5200" b="1">
+            <a:pPr algn="ctr">
+              <a:lnSpc>
+                <a:spcPct val="135000"/>
+              </a:lnSpc>
+              <a:spcBef>
+                <a:spcPts val="0"/>
+              </a:spcBef>
+              <a:spcAft>
+                <a:spcPts val="0"/>
+              </a:spcAft>
+            </a:pPr>
+            <a:r>
+              <a:rPr sz="2200" b="0">
                 <a:solidFill>
-                  <a:srgbClr val="E8ECF1"/>
+                  <a:srgbClr val="1C1B19"/>
                 </a:solidFill>
                 <a:latin typeface="Arial"/>
               </a:rPr>
-              <a:t>Watch one run.</a:t>
-            </a:r>
-          </a:p>
-          <a:p>
-            <a:pPr algn="l"/>
-            <a:r>
-              <a:rPr sz="5200" b="1">
-                <a:solidFill>
-                  <a:srgbClr val="F26B3A"/>
-                </a:solidFill>
-                <a:latin typeface="Arial"/>
-              </a:rPr>
-              <a:t>Draw the real map.</a:t>
-            </a:r>
-          </a:p>
-        </p:txBody>
-      </p:sp>
-      <p:sp>
-        <p:nvSpPr>
-          <p:cNvPr id="5" name="TextBox 4"/>
+              <a:t>Marrow instruments a single test run and produces a test→code coverage map.</a:t>
+            </a:r>
+          </a:p>
+        </p:txBody>
+      </p:sp>
+      <p:sp>
+        <p:nvSpPr>
+          <p:cNvPr id="6" name="TextBox 5"/>
           <p:cNvSpPr txBox="1"/>
           <p:nvPr/>
         </p:nvSpPr>
         <p:spPr>
           <a:xfrm>
-            <a:off x="914400" y="3977639"/>
-            <a:ext cx="9692640" cy="2011680"/>
+            <a:off x="822960" y="4224528"/>
+            <a:ext cx="10545775" cy="548640"/>
           </a:xfrm>
           <a:prstGeom prst="rect">
             <a:avLst/>
@@ -3645,31 +3866,106 @@
           </a:bodyPr>
           <a:lstStyle/>
           <a:p>
-            <a:pPr algn="l">
+            <a:pPr algn="ctr">
+              <a:spcBef>
+                <a:spcPts val="0"/>
+              </a:spcBef>
               <a:spcAft>
-                <a:spcPts val="1000"/>
+                <a:spcPts val="0"/>
               </a:spcAft>
             </a:pPr>
             <a:r>
-              <a:rPr sz="2600" b="0">
+              <a:rPr sz="1800" b="1">
                 <a:solidFill>
-                  <a:srgbClr val="E8ECF1"/>
+                  <a:srgbClr val="C2472F"/>
                 </a:solidFill>
                 <a:latin typeface="Arial"/>
               </a:rPr>
-              <a:t>Marrow instruments a single test run and produces a test → code coverage map.</a:t>
-            </a:r>
-          </a:p>
-          <a:p>
-            <a:pPr algn="l"/>
-            <a:r>
-              <a:rPr sz="2400" b="0">
+              <a:t>No annotations.   No config.</a:t>
+            </a:r>
+          </a:p>
+        </p:txBody>
+      </p:sp>
+      <p:sp>
+        <p:nvSpPr>
+          <p:cNvPr id="7" name="TextBox 6"/>
+          <p:cNvSpPr txBox="1"/>
+          <p:nvPr/>
+        </p:nvSpPr>
+        <p:spPr>
+          <a:xfrm>
+            <a:off x="822960" y="6144768"/>
+            <a:ext cx="2743200" cy="274320"/>
+          </a:xfrm>
+          <a:prstGeom prst="rect">
+            <a:avLst/>
+          </a:prstGeom>
+          <a:noFill/>
+        </p:spPr>
+        <p:txBody>
+          <a:bodyPr wrap="square" anchor="t" lIns="0" rIns="0" tIns="0" bIns="0">
+            <a:spAutoFit/>
+          </a:bodyPr>
+          <a:lstStyle/>
+          <a:p>
+            <a:pPr algn="l">
+              <a:spcBef>
+                <a:spcPts val="0"/>
+              </a:spcBef>
+              <a:spcAft>
+                <a:spcPts val="0"/>
+              </a:spcAft>
+            </a:pPr>
+            <a:r>
+              <a:rPr sz="1000" b="0">
                 <a:solidFill>
-                  <a:srgbClr val="9AA6B2"/>
+                  <a:srgbClr val="6B665F"/>
                 </a:solidFill>
                 <a:latin typeface="Arial"/>
               </a:rPr>
-              <a:t>No annotations. No config.</a:t>
+              <a:t>Marrow</a:t>
+            </a:r>
+          </a:p>
+        </p:txBody>
+      </p:sp>
+      <p:sp>
+        <p:nvSpPr>
+          <p:cNvPr id="8" name="TextBox 7"/>
+          <p:cNvSpPr txBox="1"/>
+          <p:nvPr/>
+        </p:nvSpPr>
+        <p:spPr>
+          <a:xfrm>
+            <a:off x="8625535" y="6144768"/>
+            <a:ext cx="2743200" cy="274320"/>
+          </a:xfrm>
+          <a:prstGeom prst="rect">
+            <a:avLst/>
+          </a:prstGeom>
+          <a:noFill/>
+        </p:spPr>
+        <p:txBody>
+          <a:bodyPr wrap="square" anchor="t" lIns="0" rIns="0" tIns="0" bIns="0">
+            <a:spAutoFit/>
+          </a:bodyPr>
+          <a:lstStyle/>
+          <a:p>
+            <a:pPr algn="r">
+              <a:spcBef>
+                <a:spcPts val="0"/>
+              </a:spcBef>
+              <a:spcAft>
+                <a:spcPts val="0"/>
+              </a:spcAft>
+            </a:pPr>
+            <a:r>
+              <a:rPr sz="1000" b="0">
+                <a:solidFill>
+                  <a:srgbClr val="6B665F"/>
+                </a:solidFill>
+                <a:latin typeface="Arial"/>
+              </a:rPr>
+              <a:t>3</a:t>
             </a:r>
           </a:p>
         </p:txBody>
@@ -3707,7 +4003,7 @@
             <a:avLst/>
           </a:prstGeom>
           <a:solidFill>
-            <a:srgbClr val="12161C"/>
+            <a:srgbClr val="FAF8F5"/>
           </a:solidFill>
           <a:ln>
             <a:noFill/>
@@ -3738,20 +4034,65 @@
       </p:sp>
       <p:sp>
         <p:nvSpPr>
-          <p:cNvPr id="3" name="Rectangle 2"/>
+          <p:cNvPr id="3" name="TextBox 2"/>
+          <p:cNvSpPr txBox="1"/>
+          <p:nvPr/>
+        </p:nvSpPr>
+        <p:spPr>
+          <a:xfrm>
+            <a:off x="822960" y="777240"/>
+            <a:ext cx="10545775" cy="1234440"/>
+          </a:xfrm>
+          <a:prstGeom prst="rect">
+            <a:avLst/>
+          </a:prstGeom>
+          <a:noFill/>
+        </p:spPr>
+        <p:txBody>
+          <a:bodyPr wrap="square" anchor="t" lIns="0" rIns="0" tIns="0" bIns="0">
+            <a:spAutoFit/>
+          </a:bodyPr>
+          <a:lstStyle/>
+          <a:p>
+            <a:pPr algn="ctr">
+              <a:lnSpc>
+                <a:spcPct val="110000"/>
+              </a:lnSpc>
+              <a:spcBef>
+                <a:spcPts val="0"/>
+              </a:spcBef>
+              <a:spcAft>
+                <a:spcPts val="0"/>
+              </a:spcAft>
+            </a:pPr>
+            <a:r>
+              <a:rPr sz="3400" b="1">
+                <a:solidFill>
+                  <a:srgbClr val="1C1B19"/>
+                </a:solidFill>
+                <a:latin typeface="Arial"/>
+              </a:rPr>
+              <a:t>How it works</a:t>
+            </a:r>
+          </a:p>
+        </p:txBody>
+      </p:sp>
+      <p:sp>
+        <p:nvSpPr>
+          <p:cNvPr id="4" name="Rectangle 3"/>
           <p:cNvSpPr/>
           <p:nvPr/>
         </p:nvSpPr>
         <p:spPr>
           <a:xfrm>
-            <a:off x="914400" y="1005840"/>
-            <a:ext cx="822960" cy="82296"/>
+            <a:off x="5410047" y="2084831"/>
+            <a:ext cx="1371600" cy="41148"/>
           </a:xfrm>
           <a:prstGeom prst="rect">
             <a:avLst/>
           </a:prstGeom>
           <a:solidFill>
-            <a:srgbClr val="F26B3A"/>
+            <a:srgbClr val="C2472F"/>
           </a:solidFill>
           <a:ln>
             <a:noFill/>
@@ -3782,59 +4123,26 @@
       </p:sp>
       <p:sp>
         <p:nvSpPr>
-          <p:cNvPr id="4" name="TextBox 3"/>
-          <p:cNvSpPr txBox="1"/>
-          <p:nvPr/>
-        </p:nvSpPr>
-        <p:spPr>
-          <a:xfrm>
-            <a:off x="914400" y="1325880"/>
-            <a:ext cx="10332720" cy="1097280"/>
-          </a:xfrm>
-          <a:prstGeom prst="rect">
-            <a:avLst/>
-          </a:prstGeom>
-          <a:noFill/>
-        </p:spPr>
-        <p:txBody>
-          <a:bodyPr wrap="square" anchor="t" lIns="0" rIns="0" tIns="0" bIns="0">
-            <a:spAutoFit/>
-          </a:bodyPr>
-          <a:lstStyle/>
-          <a:p>
-            <a:pPr algn="l"/>
-            <a:r>
-              <a:rPr sz="4400" b="1">
-                <a:solidFill>
-                  <a:srgbClr val="E8ECF1"/>
-                </a:solidFill>
-                <a:latin typeface="Arial"/>
-              </a:rPr>
-              <a:t>How it works</a:t>
-            </a:r>
-          </a:p>
-        </p:txBody>
-      </p:sp>
-      <p:sp>
-        <p:nvSpPr>
           <p:cNvPr id="5" name="Rounded Rectangle 4"/>
           <p:cNvSpPr/>
           <p:nvPr/>
         </p:nvSpPr>
         <p:spPr>
           <a:xfrm>
-            <a:off x="914400" y="2834640"/>
-            <a:ext cx="3291840" cy="2743200"/>
+            <a:off x="822960" y="2697480"/>
+            <a:ext cx="3210458" cy="2514600"/>
           </a:xfrm>
           <a:prstGeom prst="roundRect">
-            <a:avLst/>
+            <a:avLst>
+              <a:gd name="adj" fmla="val 4000"/>
+            </a:avLst>
           </a:prstGeom>
           <a:solidFill>
-            <a:srgbClr val="1B222B"/>
+            <a:srgbClr val="FFFFFF"/>
           </a:solidFill>
           <a:ln w="12700">
             <a:solidFill>
-              <a:srgbClr val="F26B3A"/>
+              <a:srgbClr val="E2DDD5"/>
             </a:solidFill>
           </a:ln>
           <a:effectLst/>
@@ -3869,8 +4177,8 @@
         </p:nvSpPr>
         <p:spPr>
           <a:xfrm>
-            <a:off x="1234440" y="3108960"/>
-            <a:ext cx="2651760" cy="2194560"/>
+            <a:off x="1188720" y="3063240"/>
+            <a:ext cx="2478938" cy="411480"/>
           </a:xfrm>
           <a:prstGeom prst="rect">
             <a:avLst/>
@@ -3884,44 +4192,67 @@
           <a:lstStyle/>
           <a:p>
             <a:pPr algn="l">
+              <a:spcBef>
+                <a:spcPts val="0"/>
+              </a:spcBef>
               <a:spcAft>
-                <a:spcPts val="600"/>
+                <a:spcPts val="0"/>
               </a:spcAft>
             </a:pPr>
             <a:r>
-              <a:rPr sz="4000" b="1">
+              <a:rPr sz="1500" b="1">
                 <a:solidFill>
-                  <a:srgbClr val="F26B3A"/>
+                  <a:srgbClr val="C2472F"/>
                 </a:solidFill>
                 <a:latin typeface="Arial"/>
               </a:rPr>
-              <a:t>1</a:t>
-            </a:r>
-          </a:p>
+              <a:t>01</a:t>
+            </a:r>
+          </a:p>
+        </p:txBody>
+      </p:sp>
+      <p:sp>
+        <p:nvSpPr>
+          <p:cNvPr id="7" name="TextBox 6"/>
+          <p:cNvSpPr txBox="1"/>
+          <p:nvPr/>
+        </p:nvSpPr>
+        <p:spPr>
+          <a:xfrm>
+            <a:off x="1188720" y="3657600"/>
+            <a:ext cx="2478938" cy="1371600"/>
+          </a:xfrm>
+          <a:prstGeom prst="rect">
+            <a:avLst/>
+          </a:prstGeom>
+          <a:noFill/>
+        </p:spPr>
+        <p:txBody>
+          <a:bodyPr wrap="square" anchor="t" lIns="0" rIns="0" tIns="0" bIns="0">
+            <a:spAutoFit/>
+          </a:bodyPr>
+          <a:lstStyle/>
           <a:p>
             <a:pPr algn="l">
-              <a:spcAft>
-                <a:spcPts val="1200"/>
-              </a:spcAft>
+              <a:lnSpc>
+                <a:spcPct val="130000"/>
+              </a:lnSpc>
             </a:pPr>
             <a:r>
-              <a:rPr sz="2400" b="1">
+              <a:rPr sz="1600">
                 <a:solidFill>
-                  <a:srgbClr val="E8ECF1"/>
+                  <a:srgbClr val="1C1B19"/>
                 </a:solidFill>
                 <a:latin typeface="Arial"/>
               </a:rPr>
-              <a:t>Run</a:t>
-            </a:r>
-          </a:p>
-          <a:p>
-            <a:pPr algn="l"/>
-            <a:r>
-              <a:rPr sz="1600" b="0">
+              <a:t>Run </a:t>
+            </a:r>
+            <a:r>
+              <a:rPr sz="1600">
                 <a:solidFill>
-                  <a:srgbClr val="E8ECF1"/>
+                  <a:srgbClr val="C2472F"/>
                 </a:solidFill>
-                <a:latin typeface="Courier New"/>
+                <a:latin typeface="Consolas"/>
               </a:rPr>
               <a:t>marrow watch -- &lt;your test cmd&gt;</a:t>
             </a:r>
@@ -3930,24 +4261,26 @@
       </p:sp>
       <p:sp>
         <p:nvSpPr>
-          <p:cNvPr id="7" name="Rounded Rectangle 6"/>
+          <p:cNvPr id="8" name="Rounded Rectangle 7"/>
           <p:cNvSpPr/>
           <p:nvPr/>
         </p:nvSpPr>
         <p:spPr>
           <a:xfrm>
-            <a:off x="4526280" y="2834640"/>
-            <a:ext cx="3291840" cy="2743200"/>
+            <a:off x="4490618" y="2697480"/>
+            <a:ext cx="3210458" cy="2514600"/>
           </a:xfrm>
           <a:prstGeom prst="roundRect">
-            <a:avLst/>
+            <a:avLst>
+              <a:gd name="adj" fmla="val 4000"/>
+            </a:avLst>
           </a:prstGeom>
           <a:solidFill>
-            <a:srgbClr val="1B222B"/>
+            <a:srgbClr val="FFFFFF"/>
           </a:solidFill>
           <a:ln w="12700">
             <a:solidFill>
-              <a:srgbClr val="F26B3A"/>
+              <a:srgbClr val="E2DDD5"/>
             </a:solidFill>
           </a:ln>
           <a:effectLst/>
@@ -3976,14 +4309,14 @@
       </p:sp>
       <p:sp>
         <p:nvSpPr>
-          <p:cNvPr id="8" name="TextBox 7"/>
+          <p:cNvPr id="9" name="TextBox 8"/>
           <p:cNvSpPr txBox="1"/>
           <p:nvPr/>
         </p:nvSpPr>
         <p:spPr>
           <a:xfrm>
-            <a:off x="4846320" y="3108960"/>
-            <a:ext cx="2651760" cy="2194560"/>
+            <a:off x="4856378" y="3063240"/>
+            <a:ext cx="2478938" cy="411480"/>
           </a:xfrm>
           <a:prstGeom prst="rect">
             <a:avLst/>
@@ -3997,42 +4330,56 @@
           <a:lstStyle/>
           <a:p>
             <a:pPr algn="l">
+              <a:spcBef>
+                <a:spcPts val="0"/>
+              </a:spcBef>
               <a:spcAft>
-                <a:spcPts val="600"/>
+                <a:spcPts val="0"/>
               </a:spcAft>
             </a:pPr>
             <a:r>
-              <a:rPr sz="4000" b="1">
+              <a:rPr sz="1500" b="1">
                 <a:solidFill>
-                  <a:srgbClr val="F26B3A"/>
+                  <a:srgbClr val="C2472F"/>
                 </a:solidFill>
                 <a:latin typeface="Arial"/>
               </a:rPr>
-              <a:t>2</a:t>
-            </a:r>
-          </a:p>
+              <a:t>02</a:t>
+            </a:r>
+          </a:p>
+        </p:txBody>
+      </p:sp>
+      <p:sp>
+        <p:nvSpPr>
+          <p:cNvPr id="10" name="TextBox 9"/>
+          <p:cNvSpPr txBox="1"/>
+          <p:nvPr/>
+        </p:nvSpPr>
+        <p:spPr>
+          <a:xfrm>
+            <a:off x="4856378" y="3657600"/>
+            <a:ext cx="2478938" cy="1371600"/>
+          </a:xfrm>
+          <a:prstGeom prst="rect">
+            <a:avLst/>
+          </a:prstGeom>
+          <a:noFill/>
+        </p:spPr>
+        <p:txBody>
+          <a:bodyPr wrap="square" anchor="t" lIns="0" rIns="0" tIns="0" bIns="0">
+            <a:spAutoFit/>
+          </a:bodyPr>
+          <a:lstStyle/>
           <a:p>
             <a:pPr algn="l">
-              <a:spcAft>
-                <a:spcPts val="1200"/>
-              </a:spcAft>
+              <a:lnSpc>
+                <a:spcPct val="130000"/>
+              </a:lnSpc>
             </a:pPr>
             <a:r>
-              <a:rPr sz="2400" b="1">
+              <a:rPr sz="1600">
                 <a:solidFill>
-                  <a:srgbClr val="E8ECF1"/>
-                </a:solidFill>
-                <a:latin typeface="Arial"/>
-              </a:rPr>
-              <a:t>Record</a:t>
-            </a:r>
-          </a:p>
-          <a:p>
-            <a:pPr algn="l"/>
-            <a:r>
-              <a:rPr sz="1800" b="0">
-                <a:solidFill>
-                  <a:srgbClr val="9AA6B2"/>
+                  <a:srgbClr val="1C1B19"/>
                 </a:solidFill>
                 <a:latin typeface="Arial"/>
               </a:rPr>
@@ -4043,24 +4390,26 @@
       </p:sp>
       <p:sp>
         <p:nvSpPr>
-          <p:cNvPr id="9" name="Rounded Rectangle 8"/>
+          <p:cNvPr id="11" name="Rounded Rectangle 10"/>
           <p:cNvSpPr/>
           <p:nvPr/>
         </p:nvSpPr>
         <p:spPr>
           <a:xfrm>
-            <a:off x="8138160" y="2834640"/>
-            <a:ext cx="3291840" cy="2743200"/>
+            <a:off x="8158276" y="2697480"/>
+            <a:ext cx="3210458" cy="2514600"/>
           </a:xfrm>
           <a:prstGeom prst="roundRect">
-            <a:avLst/>
+            <a:avLst>
+              <a:gd name="adj" fmla="val 4000"/>
+            </a:avLst>
           </a:prstGeom>
           <a:solidFill>
-            <a:srgbClr val="1B222B"/>
+            <a:srgbClr val="FFFFFF"/>
           </a:solidFill>
           <a:ln w="12700">
             <a:solidFill>
-              <a:srgbClr val="F26B3A"/>
+              <a:srgbClr val="E2DDD5"/>
             </a:solidFill>
           </a:ln>
           <a:effectLst/>
@@ -4089,14 +4438,14 @@
       </p:sp>
       <p:sp>
         <p:nvSpPr>
-          <p:cNvPr id="10" name="TextBox 9"/>
+          <p:cNvPr id="12" name="TextBox 11"/>
           <p:cNvSpPr txBox="1"/>
           <p:nvPr/>
         </p:nvSpPr>
         <p:spPr>
           <a:xfrm>
-            <a:off x="8458200" y="3108960"/>
-            <a:ext cx="2651760" cy="2194560"/>
+            <a:off x="8524036" y="3063240"/>
+            <a:ext cx="2478938" cy="411480"/>
           </a:xfrm>
           <a:prstGeom prst="rect">
             <a:avLst/>
@@ -4110,46 +4459,144 @@
           <a:lstStyle/>
           <a:p>
             <a:pPr algn="l">
+              <a:spcBef>
+                <a:spcPts val="0"/>
+              </a:spcBef>
               <a:spcAft>
-                <a:spcPts val="600"/>
+                <a:spcPts val="0"/>
               </a:spcAft>
             </a:pPr>
             <a:r>
-              <a:rPr sz="4000" b="1">
+              <a:rPr sz="1500" b="1">
                 <a:solidFill>
-                  <a:srgbClr val="F26B3A"/>
+                  <a:srgbClr val="C2472F"/>
                 </a:solidFill>
                 <a:latin typeface="Arial"/>
               </a:rPr>
-              <a:t>3</a:t>
-            </a:r>
-          </a:p>
+              <a:t>03</a:t>
+            </a:r>
+          </a:p>
+        </p:txBody>
+      </p:sp>
+      <p:sp>
+        <p:nvSpPr>
+          <p:cNvPr id="13" name="TextBox 12"/>
+          <p:cNvSpPr txBox="1"/>
+          <p:nvPr/>
+        </p:nvSpPr>
+        <p:spPr>
+          <a:xfrm>
+            <a:off x="8524036" y="3657600"/>
+            <a:ext cx="2478938" cy="1371600"/>
+          </a:xfrm>
+          <a:prstGeom prst="rect">
+            <a:avLst/>
+          </a:prstGeom>
+          <a:noFill/>
+        </p:spPr>
+        <p:txBody>
+          <a:bodyPr wrap="square" anchor="t" lIns="0" rIns="0" tIns="0" bIns="0">
+            <a:spAutoFit/>
+          </a:bodyPr>
+          <a:lstStyle/>
           <a:p>
             <a:pPr algn="l">
-              <a:spcAft>
-                <a:spcPts val="1200"/>
-              </a:spcAft>
+              <a:lnSpc>
+                <a:spcPct val="130000"/>
+              </a:lnSpc>
             </a:pPr>
             <a:r>
-              <a:rPr sz="2400" b="1">
+              <a:rPr sz="1600">
                 <a:solidFill>
-                  <a:srgbClr val="E8ECF1"/>
+                  <a:srgbClr val="1C1B19"/>
                 </a:solidFill>
                 <a:latin typeface="Arial"/>
               </a:rPr>
-              <a:t>Map</a:t>
-            </a:r>
-          </a:p>
-          <a:p>
-            <a:pPr algn="l"/>
-            <a:r>
-              <a:rPr sz="1800" b="0">
+              <a:t>It emits an interactive map, plus a list of dead tests and untested lines.</a:t>
+            </a:r>
+          </a:p>
+        </p:txBody>
+      </p:sp>
+      <p:sp>
+        <p:nvSpPr>
+          <p:cNvPr id="14" name="TextBox 13"/>
+          <p:cNvSpPr txBox="1"/>
+          <p:nvPr/>
+        </p:nvSpPr>
+        <p:spPr>
+          <a:xfrm>
+            <a:off x="822960" y="6144768"/>
+            <a:ext cx="2743200" cy="274320"/>
+          </a:xfrm>
+          <a:prstGeom prst="rect">
+            <a:avLst/>
+          </a:prstGeom>
+          <a:noFill/>
+        </p:spPr>
+        <p:txBody>
+          <a:bodyPr wrap="square" anchor="t" lIns="0" rIns="0" tIns="0" bIns="0">
+            <a:spAutoFit/>
+          </a:bodyPr>
+          <a:lstStyle/>
+          <a:p>
+            <a:pPr algn="l">
+              <a:spcBef>
+                <a:spcPts val="0"/>
+              </a:spcBef>
+              <a:spcAft>
+                <a:spcPts val="0"/>
+              </a:spcAft>
+            </a:pPr>
+            <a:r>
+              <a:rPr sz="1000" b="0">
                 <a:solidFill>
-                  <a:srgbClr val="9AA6B2"/>
+                  <a:srgbClr val="6B665F"/>
                 </a:solidFill>
                 <a:latin typeface="Arial"/>
               </a:rPr>
-              <a:t>It emits an interactive map plus a list of dead tests and untested lines.</a:t>
+              <a:t>Marrow</a:t>
+            </a:r>
+          </a:p>
+        </p:txBody>
+      </p:sp>
+      <p:sp>
+        <p:nvSpPr>
+          <p:cNvPr id="15" name="TextBox 14"/>
+          <p:cNvSpPr txBox="1"/>
+          <p:nvPr/>
+        </p:nvSpPr>
+        <p:spPr>
+          <a:xfrm>
+            <a:off x="8625535" y="6144768"/>
+            <a:ext cx="2743200" cy="274320"/>
+          </a:xfrm>
+          <a:prstGeom prst="rect">
+            <a:avLst/>
+          </a:prstGeom>
+          <a:noFill/>
+        </p:spPr>
+        <p:txBody>
+          <a:bodyPr wrap="square" anchor="t" lIns="0" rIns="0" tIns="0" bIns="0">
+            <a:spAutoFit/>
+          </a:bodyPr>
+          <a:lstStyle/>
+          <a:p>
+            <a:pPr algn="r">
+              <a:spcBef>
+                <a:spcPts val="0"/>
+              </a:spcBef>
+              <a:spcAft>
+                <a:spcPts val="0"/>
+              </a:spcAft>
+            </a:pPr>
+            <a:r>
+              <a:rPr sz="1000" b="0">
+                <a:solidFill>
+                  <a:srgbClr val="6B665F"/>
+                </a:solidFill>
+                <a:latin typeface="Arial"/>
+              </a:rPr>
+              <a:t>4</a:t>
             </a:r>
           </a:p>
         </p:txBody>
@@ -4187,7 +4634,7 @@
             <a:avLst/>
           </a:prstGeom>
           <a:solidFill>
-            <a:srgbClr val="12161C"/>
+            <a:srgbClr val="FAF8F5"/>
           </a:solidFill>
           <a:ln>
             <a:noFill/>
@@ -4218,20 +4665,65 @@
       </p:sp>
       <p:sp>
         <p:nvSpPr>
-          <p:cNvPr id="3" name="Rectangle 2"/>
+          <p:cNvPr id="3" name="TextBox 2"/>
+          <p:cNvSpPr txBox="1"/>
+          <p:nvPr/>
+        </p:nvSpPr>
+        <p:spPr>
+          <a:xfrm>
+            <a:off x="822960" y="777240"/>
+            <a:ext cx="10545775" cy="1234440"/>
+          </a:xfrm>
+          <a:prstGeom prst="rect">
+            <a:avLst/>
+          </a:prstGeom>
+          <a:noFill/>
+        </p:spPr>
+        <p:txBody>
+          <a:bodyPr wrap="square" anchor="t" lIns="0" rIns="0" tIns="0" bIns="0">
+            <a:spAutoFit/>
+          </a:bodyPr>
+          <a:lstStyle/>
+          <a:p>
+            <a:pPr algn="ctr">
+              <a:lnSpc>
+                <a:spcPct val="110000"/>
+              </a:lnSpc>
+              <a:spcBef>
+                <a:spcPts val="0"/>
+              </a:spcBef>
+              <a:spcAft>
+                <a:spcPts val="0"/>
+              </a:spcAft>
+            </a:pPr>
+            <a:r>
+              <a:rPr sz="3400" b="1">
+                <a:solidFill>
+                  <a:srgbClr val="1C1B19"/>
+                </a:solidFill>
+                <a:latin typeface="Arial"/>
+              </a:rPr>
+              <a:t>Install Marrow</a:t>
+            </a:r>
+          </a:p>
+        </p:txBody>
+      </p:sp>
+      <p:sp>
+        <p:nvSpPr>
+          <p:cNvPr id="4" name="Rectangle 3"/>
           <p:cNvSpPr/>
           <p:nvPr/>
         </p:nvSpPr>
         <p:spPr>
           <a:xfrm>
-            <a:off x="914400" y="2148840"/>
-            <a:ext cx="1280160" cy="109728"/>
+            <a:off x="5410047" y="2084831"/>
+            <a:ext cx="1371600" cy="41148"/>
           </a:xfrm>
           <a:prstGeom prst="rect">
             <a:avLst/>
           </a:prstGeom>
           <a:solidFill>
-            <a:srgbClr val="F26B3A"/>
+            <a:srgbClr val="C2472F"/>
           </a:solidFill>
           <a:ln>
             <a:noFill/>
@@ -4262,59 +4754,26 @@
       </p:sp>
       <p:sp>
         <p:nvSpPr>
-          <p:cNvPr id="4" name="TextBox 3"/>
-          <p:cNvSpPr txBox="1"/>
-          <p:nvPr/>
-        </p:nvSpPr>
-        <p:spPr>
-          <a:xfrm>
-            <a:off x="914400" y="2377440"/>
-            <a:ext cx="10332720" cy="1097280"/>
-          </a:xfrm>
-          <a:prstGeom prst="rect">
-            <a:avLst/>
-          </a:prstGeom>
-          <a:noFill/>
-        </p:spPr>
-        <p:txBody>
-          <a:bodyPr wrap="square" anchor="t" lIns="0" rIns="0" tIns="0" bIns="0">
-            <a:spAutoFit/>
-          </a:bodyPr>
-          <a:lstStyle/>
-          <a:p>
-            <a:pPr algn="l"/>
-            <a:r>
-              <a:rPr sz="6000" b="1">
-                <a:solidFill>
-                  <a:srgbClr val="E8ECF1"/>
-                </a:solidFill>
-                <a:latin typeface="Arial"/>
-              </a:rPr>
-              <a:t>Install Marrow</a:t>
-            </a:r>
-          </a:p>
-        </p:txBody>
-      </p:sp>
-      <p:sp>
-        <p:nvSpPr>
           <p:cNvPr id="5" name="Rounded Rectangle 4"/>
           <p:cNvSpPr/>
           <p:nvPr/>
         </p:nvSpPr>
         <p:spPr>
           <a:xfrm>
-            <a:off x="914400" y="3611880"/>
-            <a:ext cx="4754880" cy="868680"/>
+            <a:off x="3626967" y="2880360"/>
+            <a:ext cx="4937760" cy="1051560"/>
           </a:xfrm>
           <a:prstGeom prst="roundRect">
-            <a:avLst/>
+            <a:avLst>
+              <a:gd name="adj" fmla="val 16000"/>
+            </a:avLst>
           </a:prstGeom>
           <a:solidFill>
-            <a:srgbClr val="1B222B"/>
+            <a:srgbClr val="FFFFFF"/>
           </a:solidFill>
-          <a:ln w="12700">
+          <a:ln w="15875">
             <a:solidFill>
-              <a:srgbClr val="F26B3A"/>
+              <a:srgbClr val="C2472F"/>
             </a:solidFill>
           </a:ln>
           <a:effectLst/>
@@ -4334,16 +4793,23 @@
           </a:fontRef>
         </p:style>
         <p:txBody>
-          <a:bodyPr rtlCol="0" anchor="ctr" lIns="320040"/>
-          <a:lstStyle/>
-          <a:p>
-            <a:pPr algn="l"/>
-            <a:r>
-              <a:rPr sz="2800" b="0">
+          <a:bodyPr rtlCol="0" anchor="ctr" wrap="square"/>
+          <a:lstStyle/>
+          <a:p>
+            <a:pPr algn="ctr">
+              <a:spcBef>
+                <a:spcPts val="0"/>
+              </a:spcBef>
+              <a:spcAft>
+                <a:spcPts val="0"/>
+              </a:spcAft>
+            </a:pPr>
+            <a:r>
+              <a:rPr sz="2800" b="1">
                 <a:solidFill>
-                  <a:srgbClr val="E8ECF1"/>
+                  <a:srgbClr val="1C1B19"/>
                 </a:solidFill>
-                <a:latin typeface="Courier New"/>
+                <a:latin typeface="Consolas"/>
               </a:rPr>
               <a:t>pipx install marrow</a:t>
             </a:r>
@@ -4358,8 +4824,8 @@
         </p:nvSpPr>
         <p:spPr>
           <a:xfrm>
-            <a:off x="914400" y="4892040"/>
-            <a:ext cx="10332720" cy="731520"/>
+            <a:off x="822960" y="4315968"/>
+            <a:ext cx="10545775" cy="457200"/>
           </a:xfrm>
           <a:prstGeom prst="rect">
             <a:avLst/>
@@ -4372,15 +4838,106 @@
           </a:bodyPr>
           <a:lstStyle/>
           <a:p>
-            <a:pPr algn="l"/>
-            <a:r>
-              <a:rPr sz="2400" b="0">
+            <a:pPr algn="ctr">
+              <a:spcBef>
+                <a:spcPts val="0"/>
+              </a:spcBef>
+              <a:spcAft>
+                <a:spcPts val="0"/>
+              </a:spcAft>
+            </a:pPr>
+            <a:r>
+              <a:rPr sz="2200" b="0">
                 <a:solidFill>
-                  <a:srgbClr val="9AA6B2"/>
+                  <a:srgbClr val="6B665F"/>
                 </a:solidFill>
                 <a:latin typeface="Arial"/>
               </a:rPr>
               <a:t>Works with pytest, Jest, go test.</a:t>
+            </a:r>
+          </a:p>
+        </p:txBody>
+      </p:sp>
+      <p:sp>
+        <p:nvSpPr>
+          <p:cNvPr id="7" name="TextBox 6"/>
+          <p:cNvSpPr txBox="1"/>
+          <p:nvPr/>
+        </p:nvSpPr>
+        <p:spPr>
+          <a:xfrm>
+            <a:off x="822960" y="6144768"/>
+            <a:ext cx="2743200" cy="274320"/>
+          </a:xfrm>
+          <a:prstGeom prst="rect">
+            <a:avLst/>
+          </a:prstGeom>
+          <a:noFill/>
+        </p:spPr>
+        <p:txBody>
+          <a:bodyPr wrap="square" anchor="t" lIns="0" rIns="0" tIns="0" bIns="0">
+            <a:spAutoFit/>
+          </a:bodyPr>
+          <a:lstStyle/>
+          <a:p>
+            <a:pPr algn="l">
+              <a:spcBef>
+                <a:spcPts val="0"/>
+              </a:spcBef>
+              <a:spcAft>
+                <a:spcPts val="0"/>
+              </a:spcAft>
+            </a:pPr>
+            <a:r>
+              <a:rPr sz="1000" b="0">
+                <a:solidFill>
+                  <a:srgbClr val="6B665F"/>
+                </a:solidFill>
+                <a:latin typeface="Arial"/>
+              </a:rPr>
+              <a:t>Marrow</a:t>
+            </a:r>
+          </a:p>
+        </p:txBody>
+      </p:sp>
+      <p:sp>
+        <p:nvSpPr>
+          <p:cNvPr id="8" name="TextBox 7"/>
+          <p:cNvSpPr txBox="1"/>
+          <p:nvPr/>
+        </p:nvSpPr>
+        <p:spPr>
+          <a:xfrm>
+            <a:off x="8625535" y="6144768"/>
+            <a:ext cx="2743200" cy="274320"/>
+          </a:xfrm>
+          <a:prstGeom prst="rect">
+            <a:avLst/>
+          </a:prstGeom>
+          <a:noFill/>
+        </p:spPr>
+        <p:txBody>
+          <a:bodyPr wrap="square" anchor="t" lIns="0" rIns="0" tIns="0" bIns="0">
+            <a:spAutoFit/>
+          </a:bodyPr>
+          <a:lstStyle/>
+          <a:p>
+            <a:pPr algn="r">
+              <a:spcBef>
+                <a:spcPts val="0"/>
+              </a:spcBef>
+              <a:spcAft>
+                <a:spcPts val="0"/>
+              </a:spcAft>
+            </a:pPr>
+            <a:r>
+              <a:rPr sz="1000" b="0">
+                <a:solidFill>
+                  <a:srgbClr val="6B665F"/>
+                </a:solidFill>
+                <a:latin typeface="Arial"/>
+              </a:rPr>
+              <a:t>5</a:t>
             </a:r>
           </a:p>
         </p:txBody>

--- a/harness/out/pptx/pitch_deck_reorder/cold/deck.pptx
+++ b/harness/out/pptx/pitch_deck_reorder/cold/deck.pptx
@@ -3107,7 +3107,7 @@
             <a:avLst/>
           </a:prstGeom>
           <a:solidFill>
-            <a:srgbClr val="FAF8F5"/>
+            <a:srgbClr val="FBFAF8"/>
           </a:solidFill>
           <a:ln>
             <a:noFill/>
@@ -3144,8 +3144,8 @@
         </p:nvSpPr>
         <p:spPr>
           <a:xfrm>
-            <a:off x="822960" y="2331720"/>
-            <a:ext cx="10545775" cy="1188720"/>
+            <a:off x="822960" y="2240280"/>
+            <a:ext cx="10545775" cy="1280160"/>
           </a:xfrm>
           <a:prstGeom prst="rect">
             <a:avLst/>
@@ -3159,17 +3159,17 @@
           <a:lstStyle/>
           <a:p>
             <a:pPr algn="ctr">
-              <a:spcBef>
-                <a:spcPts val="0"/>
-              </a:spcBef>
+              <a:lnSpc>
+                <a:spcPct val="115000"/>
+              </a:lnSpc>
               <a:spcAft>
                 <a:spcPts val="0"/>
               </a:spcAft>
             </a:pPr>
             <a:r>
-              <a:rPr sz="6200" b="1">
+              <a:rPr sz="7200" b="1">
                 <a:solidFill>
-                  <a:srgbClr val="1C1B19"/>
+                  <a:srgbClr val="17181A"/>
                 </a:solidFill>
                 <a:latin typeface="Arial"/>
               </a:rPr>
@@ -3186,14 +3186,14 @@
         </p:nvSpPr>
         <p:spPr>
           <a:xfrm>
-            <a:off x="5181447" y="3611880"/>
-            <a:ext cx="1828800" cy="41148"/>
+            <a:off x="5364327" y="3703320"/>
+            <a:ext cx="1463040" cy="50800"/>
           </a:xfrm>
           <a:prstGeom prst="rect">
             <a:avLst/>
           </a:prstGeom>
           <a:solidFill>
-            <a:srgbClr val="C2472F"/>
+            <a:srgbClr val="B4531F"/>
           </a:solidFill>
           <a:ln>
             <a:noFill/>
@@ -3230,7 +3230,7 @@
         </p:nvSpPr>
         <p:spPr>
           <a:xfrm>
-            <a:off x="822960" y="3977639"/>
+            <a:off x="822960" y="4160520"/>
             <a:ext cx="10545775" cy="640080"/>
           </a:xfrm>
           <a:prstGeom prst="rect">
@@ -3245,63 +3245,21 @@
           <a:lstStyle/>
           <a:p>
             <a:pPr algn="ctr">
-              <a:spcBef>
-                <a:spcPts val="0"/>
-              </a:spcBef>
+              <a:lnSpc>
+                <a:spcPct val="115000"/>
+              </a:lnSpc>
               <a:spcAft>
                 <a:spcPts val="0"/>
               </a:spcAft>
             </a:pPr>
             <a:r>
-              <a:rPr sz="2200" b="0">
+              <a:rPr sz="2400" b="0">
                 <a:solidFill>
-                  <a:srgbClr val="6B665F"/>
+                  <a:srgbClr val="5F6368"/>
                 </a:solidFill>
                 <a:latin typeface="Arial"/>
               </a:rPr>
               <a:t>Know what your tests actually cover.</a:t>
-            </a:r>
-          </a:p>
-        </p:txBody>
-      </p:sp>
-      <p:sp>
-        <p:nvSpPr>
-          <p:cNvPr id="6" name="TextBox 5"/>
-          <p:cNvSpPr txBox="1"/>
-          <p:nvPr/>
-        </p:nvSpPr>
-        <p:spPr>
-          <a:xfrm>
-            <a:off x="822960" y="6053328"/>
-            <a:ext cx="10545775" cy="365760"/>
-          </a:xfrm>
-          <a:prstGeom prst="rect">
-            <a:avLst/>
-          </a:prstGeom>
-          <a:noFill/>
-        </p:spPr>
-        <p:txBody>
-          <a:bodyPr wrap="square" anchor="t" lIns="0" rIns="0" tIns="0" bIns="0">
-            <a:spAutoFit/>
-          </a:bodyPr>
-          <a:lstStyle/>
-          <a:p>
-            <a:pPr algn="ctr">
-              <a:spcBef>
-                <a:spcPts val="0"/>
-              </a:spcBef>
-              <a:spcAft>
-                <a:spcPts val="0"/>
-              </a:spcAft>
-            </a:pPr>
-            <a:r>
-              <a:rPr sz="1000" b="0">
-                <a:solidFill>
-                  <a:srgbClr val="6B665F"/>
-                </a:solidFill>
-                <a:latin typeface="Arial"/>
-              </a:rPr>
-              <a:t>A CLI that maps a repo's tests to the code they actually cover.</a:t>
             </a:r>
           </a:p>
         </p:txBody>
@@ -3339,7 +3297,7 @@
             <a:avLst/>
           </a:prstGeom>
           <a:solidFill>
-            <a:srgbClr val="FAF8F5"/>
+            <a:srgbClr val="FBFAF8"/>
           </a:solidFill>
           <a:ln>
             <a:noFill/>
@@ -3376,8 +3334,8 @@
         </p:nvSpPr>
         <p:spPr>
           <a:xfrm>
-            <a:off x="822960" y="777240"/>
-            <a:ext cx="10545775" cy="1234440"/>
+            <a:off x="822960" y="868680"/>
+            <a:ext cx="10545775" cy="1005840"/>
           </a:xfrm>
           <a:prstGeom prst="rect">
             <a:avLst/>
@@ -3392,19 +3350,16 @@
           <a:p>
             <a:pPr algn="ctr">
               <a:lnSpc>
-                <a:spcPct val="110000"/>
+                <a:spcPct val="115000"/>
               </a:lnSpc>
-              <a:spcBef>
-                <a:spcPts val="0"/>
-              </a:spcBef>
               <a:spcAft>
                 <a:spcPts val="0"/>
               </a:spcAft>
             </a:pPr>
             <a:r>
-              <a:rPr sz="3400" b="1">
+              <a:rPr sz="4000" b="1">
                 <a:solidFill>
-                  <a:srgbClr val="1C1B19"/>
+                  <a:srgbClr val="17181A"/>
                 </a:solidFill>
                 <a:latin typeface="Arial"/>
               </a:rPr>
@@ -3421,14 +3376,14 @@
         </p:nvSpPr>
         <p:spPr>
           <a:xfrm>
-            <a:off x="5410047" y="2084831"/>
-            <a:ext cx="1371600" cy="41148"/>
+            <a:off x="5547207" y="1965960"/>
+            <a:ext cx="1097280" cy="50800"/>
           </a:xfrm>
           <a:prstGeom prst="rect">
             <a:avLst/>
           </a:prstGeom>
           <a:solidFill>
-            <a:srgbClr val="C2472F"/>
+            <a:srgbClr val="B4531F"/>
           </a:solidFill>
           <a:ln>
             <a:noFill/>
@@ -3465,8 +3420,8 @@
         </p:nvSpPr>
         <p:spPr>
           <a:xfrm>
-            <a:off x="1798167" y="2788920"/>
-            <a:ext cx="8595360" cy="2377440"/>
+            <a:off x="1965960" y="2606040"/>
+            <a:ext cx="8259775" cy="2377440"/>
           </a:xfrm>
           <a:prstGeom prst="rect">
             <a:avLst/>
@@ -3479,171 +3434,41 @@
           </a:bodyPr>
           <a:lstStyle/>
           <a:p>
-            <a:pPr algn="l">
+            <a:pPr algn="ctr">
               <a:lnSpc>
-                <a:spcPct val="130000"/>
+                <a:spcPct val="135000"/>
               </a:lnSpc>
               <a:spcAft>
-                <a:spcPts val="1600"/>
+                <a:spcPts val="1800"/>
               </a:spcAft>
             </a:pPr>
             <a:r>
-              <a:rPr sz="1800" b="1">
+              <a:rPr sz="2000" b="0">
                 <a:solidFill>
-                  <a:srgbClr val="C2472F"/>
+                  <a:srgbClr val="17181A"/>
                 </a:solidFill>
                 <a:latin typeface="Arial"/>
               </a:rPr>
-              <a:t>•   </a:t>
-            </a:r>
-            <a:r>
-              <a:rPr sz="1800">
-                <a:solidFill>
-                  <a:srgbClr val="1C1B19"/>
-                </a:solidFill>
-                <a:latin typeface="Arial"/>
-              </a:rPr>
-              <a:t>Large suites are slow — a full run is a coffee break, not a feedback loop.</a:t>
-            </a:r>
-          </a:p>
-          <a:p>
-            <a:pPr algn="l">
+              <a:t>Large suites are slow, and nobody knows which tests cover which code.</a:t>
+            </a:r>
+          </a:p>
+          <a:p>
+            <a:pPr algn="ctr">
               <a:lnSpc>
-                <a:spcPct val="130000"/>
+                <a:spcPct val="135000"/>
               </a:lnSpc>
-              <a:spcAft>
-                <a:spcPts val="1600"/>
-              </a:spcAft>
-            </a:pPr>
-            <a:r>
-              <a:rPr sz="1800" b="1">
-                <a:solidFill>
-                  <a:srgbClr val="C2472F"/>
-                </a:solidFill>
-                <a:latin typeface="Arial"/>
-              </a:rPr>
-              <a:t>•   </a:t>
-            </a:r>
-            <a:r>
-              <a:rPr sz="1800">
-                <a:solidFill>
-                  <a:srgbClr val="1C1B19"/>
-                </a:solidFill>
-                <a:latin typeface="Arial"/>
-              </a:rPr>
-              <a:t>Nobody knows which tests cover which code.</a:t>
-            </a:r>
-          </a:p>
-          <a:p>
-            <a:pPr algn="l">
-              <a:lnSpc>
-                <a:spcPct val="130000"/>
-              </a:lnSpc>
-              <a:spcAft>
-                <a:spcPts val="1600"/>
-              </a:spcAft>
-            </a:pPr>
-            <a:r>
-              <a:rPr sz="1800" b="1">
-                <a:solidFill>
-                  <a:srgbClr val="C2472F"/>
-                </a:solidFill>
-                <a:latin typeface="Arial"/>
-              </a:rPr>
-              <a:t>•   </a:t>
-            </a:r>
-            <a:r>
-              <a:rPr sz="1800">
-                <a:solidFill>
-                  <a:srgbClr val="1C1B19"/>
-                </a:solidFill>
-                <a:latin typeface="Arial"/>
-              </a:rPr>
-              <a:t>So dead tests linger, and real gaps go unnoticed.</a:t>
-            </a:r>
-          </a:p>
-        </p:txBody>
-      </p:sp>
-      <p:sp>
-        <p:nvSpPr>
-          <p:cNvPr id="6" name="TextBox 5"/>
-          <p:cNvSpPr txBox="1"/>
-          <p:nvPr/>
-        </p:nvSpPr>
-        <p:spPr>
-          <a:xfrm>
-            <a:off x="822960" y="6144768"/>
-            <a:ext cx="2743200" cy="274320"/>
-          </a:xfrm>
-          <a:prstGeom prst="rect">
-            <a:avLst/>
-          </a:prstGeom>
-          <a:noFill/>
-        </p:spPr>
-        <p:txBody>
-          <a:bodyPr wrap="square" anchor="t" lIns="0" rIns="0" tIns="0" bIns="0">
-            <a:spAutoFit/>
-          </a:bodyPr>
-          <a:lstStyle/>
-          <a:p>
-            <a:pPr algn="l">
-              <a:spcBef>
-                <a:spcPts val="0"/>
-              </a:spcBef>
               <a:spcAft>
                 <a:spcPts val="0"/>
               </a:spcAft>
             </a:pPr>
             <a:r>
-              <a:rPr sz="1000" b="0">
+              <a:rPr sz="2000" b="0">
                 <a:solidFill>
-                  <a:srgbClr val="6B665F"/>
+                  <a:srgbClr val="5F6368"/>
                 </a:solidFill>
                 <a:latin typeface="Arial"/>
               </a:rPr>
-              <a:t>Marrow</a:t>
-            </a:r>
-          </a:p>
-        </p:txBody>
-      </p:sp>
-      <p:sp>
-        <p:nvSpPr>
-          <p:cNvPr id="7" name="TextBox 6"/>
-          <p:cNvSpPr txBox="1"/>
-          <p:nvPr/>
-        </p:nvSpPr>
-        <p:spPr>
-          <a:xfrm>
-            <a:off x="8625535" y="6144768"/>
-            <a:ext cx="2743200" cy="274320"/>
-          </a:xfrm>
-          <a:prstGeom prst="rect">
-            <a:avLst/>
-          </a:prstGeom>
-          <a:noFill/>
-        </p:spPr>
-        <p:txBody>
-          <a:bodyPr wrap="square" anchor="t" lIns="0" rIns="0" tIns="0" bIns="0">
-            <a:spAutoFit/>
-          </a:bodyPr>
-          <a:lstStyle/>
-          <a:p>
-            <a:pPr algn="r">
-              <a:spcBef>
-                <a:spcPts val="0"/>
-              </a:spcBef>
-              <a:spcAft>
-                <a:spcPts val="0"/>
-              </a:spcAft>
-            </a:pPr>
-            <a:r>
-              <a:rPr sz="1000" b="0">
-                <a:solidFill>
-                  <a:srgbClr val="6B665F"/>
-                </a:solidFill>
-                <a:latin typeface="Arial"/>
-              </a:rPr>
-              <a:t>2</a:t>
+              <a:t>So dead tests linger for years — and the real gaps go unnoticed.</a:t>
             </a:r>
           </a:p>
         </p:txBody>
@@ -3681,7 +3506,7 @@
             <a:avLst/>
           </a:prstGeom>
           <a:solidFill>
-            <a:srgbClr val="FAF8F5"/>
+            <a:srgbClr val="FBFAF8"/>
           </a:solidFill>
           <a:ln>
             <a:noFill/>
@@ -3718,8 +3543,8 @@
         </p:nvSpPr>
         <p:spPr>
           <a:xfrm>
-            <a:off x="822960" y="777240"/>
-            <a:ext cx="10545775" cy="1234440"/>
+            <a:off x="822960" y="868680"/>
+            <a:ext cx="10545775" cy="1005840"/>
           </a:xfrm>
           <a:prstGeom prst="rect">
             <a:avLst/>
@@ -3734,19 +3559,16 @@
           <a:p>
             <a:pPr algn="ctr">
               <a:lnSpc>
-                <a:spcPct val="110000"/>
+                <a:spcPct val="115000"/>
               </a:lnSpc>
-              <a:spcBef>
-                <a:spcPts val="0"/>
-              </a:spcBef>
               <a:spcAft>
                 <a:spcPts val="0"/>
               </a:spcAft>
             </a:pPr>
             <a:r>
-              <a:rPr sz="3400" b="1">
+              <a:rPr sz="4000" b="1">
                 <a:solidFill>
-                  <a:srgbClr val="1C1B19"/>
+                  <a:srgbClr val="17181A"/>
                 </a:solidFill>
                 <a:latin typeface="Arial"/>
               </a:rPr>
@@ -3763,14 +3585,14 @@
         </p:nvSpPr>
         <p:spPr>
           <a:xfrm>
-            <a:off x="5410047" y="2084831"/>
-            <a:ext cx="1371600" cy="41148"/>
+            <a:off x="5547207" y="1965960"/>
+            <a:ext cx="1097280" cy="50800"/>
           </a:xfrm>
           <a:prstGeom prst="rect">
             <a:avLst/>
           </a:prstGeom>
           <a:solidFill>
-            <a:srgbClr val="C2472F"/>
+            <a:srgbClr val="B4531F"/>
           </a:solidFill>
           <a:ln>
             <a:noFill/>
@@ -3807,8 +3629,8 @@
         </p:nvSpPr>
         <p:spPr>
           <a:xfrm>
-            <a:off x="1920240" y="2834640"/>
-            <a:ext cx="8351215" cy="1463040"/>
+            <a:off x="1965960" y="2606040"/>
+            <a:ext cx="8259775" cy="2377440"/>
           </a:xfrm>
           <a:prstGeom prst="rect">
             <a:avLst/>
@@ -3825,147 +3647,37 @@
               <a:lnSpc>
                 <a:spcPct val="135000"/>
               </a:lnSpc>
-              <a:spcBef>
-                <a:spcPts val="0"/>
-              </a:spcBef>
+              <a:spcAft>
+                <a:spcPts val="1800"/>
+              </a:spcAft>
+            </a:pPr>
+            <a:r>
+              <a:rPr sz="2000" b="0">
+                <a:solidFill>
+                  <a:srgbClr val="17181A"/>
+                </a:solidFill>
+                <a:latin typeface="Arial"/>
+              </a:rPr>
+              <a:t>Marrow instruments a single test run and produces a test → code coverage map.</a:t>
+            </a:r>
+          </a:p>
+          <a:p>
+            <a:pPr algn="ctr">
+              <a:lnSpc>
+                <a:spcPct val="115000"/>
+              </a:lnSpc>
               <a:spcAft>
                 <a:spcPts val="0"/>
               </a:spcAft>
             </a:pPr>
             <a:r>
-              <a:rPr sz="2200" b="0">
+              <a:rPr sz="2400" b="1">
                 <a:solidFill>
-                  <a:srgbClr val="1C1B19"/>
+                  <a:srgbClr val="B4531F"/>
                 </a:solidFill>
                 <a:latin typeface="Arial"/>
               </a:rPr>
-              <a:t>Marrow instruments a single test run and produces a test→code coverage map.</a:t>
-            </a:r>
-          </a:p>
-        </p:txBody>
-      </p:sp>
-      <p:sp>
-        <p:nvSpPr>
-          <p:cNvPr id="6" name="TextBox 5"/>
-          <p:cNvSpPr txBox="1"/>
-          <p:nvPr/>
-        </p:nvSpPr>
-        <p:spPr>
-          <a:xfrm>
-            <a:off x="822960" y="4224528"/>
-            <a:ext cx="10545775" cy="548640"/>
-          </a:xfrm>
-          <a:prstGeom prst="rect">
-            <a:avLst/>
-          </a:prstGeom>
-          <a:noFill/>
-        </p:spPr>
-        <p:txBody>
-          <a:bodyPr wrap="square" anchor="t" lIns="0" rIns="0" tIns="0" bIns="0">
-            <a:spAutoFit/>
-          </a:bodyPr>
-          <a:lstStyle/>
-          <a:p>
-            <a:pPr algn="ctr">
-              <a:spcBef>
-                <a:spcPts val="0"/>
-              </a:spcBef>
-              <a:spcAft>
-                <a:spcPts val="0"/>
-              </a:spcAft>
-            </a:pPr>
-            <a:r>
-              <a:rPr sz="1800" b="1">
-                <a:solidFill>
-                  <a:srgbClr val="C2472F"/>
-                </a:solidFill>
-                <a:latin typeface="Arial"/>
-              </a:rPr>
-              <a:t>No annotations.   No config.</a:t>
-            </a:r>
-          </a:p>
-        </p:txBody>
-      </p:sp>
-      <p:sp>
-        <p:nvSpPr>
-          <p:cNvPr id="7" name="TextBox 6"/>
-          <p:cNvSpPr txBox="1"/>
-          <p:nvPr/>
-        </p:nvSpPr>
-        <p:spPr>
-          <a:xfrm>
-            <a:off x="822960" y="6144768"/>
-            <a:ext cx="2743200" cy="274320"/>
-          </a:xfrm>
-          <a:prstGeom prst="rect">
-            <a:avLst/>
-          </a:prstGeom>
-          <a:noFill/>
-        </p:spPr>
-        <p:txBody>
-          <a:bodyPr wrap="square" anchor="t" lIns="0" rIns="0" tIns="0" bIns="0">
-            <a:spAutoFit/>
-          </a:bodyPr>
-          <a:lstStyle/>
-          <a:p>
-            <a:pPr algn="l">
-              <a:spcBef>
-                <a:spcPts val="0"/>
-              </a:spcBef>
-              <a:spcAft>
-                <a:spcPts val="0"/>
-              </a:spcAft>
-            </a:pPr>
-            <a:r>
-              <a:rPr sz="1000" b="0">
-                <a:solidFill>
-                  <a:srgbClr val="6B665F"/>
-                </a:solidFill>
-                <a:latin typeface="Arial"/>
-              </a:rPr>
-              <a:t>Marrow</a:t>
-            </a:r>
-          </a:p>
-        </p:txBody>
-      </p:sp>
-      <p:sp>
-        <p:nvSpPr>
-          <p:cNvPr id="8" name="TextBox 7"/>
-          <p:cNvSpPr txBox="1"/>
-          <p:nvPr/>
-        </p:nvSpPr>
-        <p:spPr>
-          <a:xfrm>
-            <a:off x="8625535" y="6144768"/>
-            <a:ext cx="2743200" cy="274320"/>
-          </a:xfrm>
-          <a:prstGeom prst="rect">
-            <a:avLst/>
-          </a:prstGeom>
-          <a:noFill/>
-        </p:spPr>
-        <p:txBody>
-          <a:bodyPr wrap="square" anchor="t" lIns="0" rIns="0" tIns="0" bIns="0">
-            <a:spAutoFit/>
-          </a:bodyPr>
-          <a:lstStyle/>
-          <a:p>
-            <a:pPr algn="r">
-              <a:spcBef>
-                <a:spcPts val="0"/>
-              </a:spcBef>
-              <a:spcAft>
-                <a:spcPts val="0"/>
-              </a:spcAft>
-            </a:pPr>
-            <a:r>
-              <a:rPr sz="1000" b="0">
-                <a:solidFill>
-                  <a:srgbClr val="6B665F"/>
-                </a:solidFill>
-                <a:latin typeface="Arial"/>
-              </a:rPr>
-              <a:t>3</a:t>
+              <a:t>No annotations. No config.</a:t>
             </a:r>
           </a:p>
         </p:txBody>
@@ -4003,7 +3715,7 @@
             <a:avLst/>
           </a:prstGeom>
           <a:solidFill>
-            <a:srgbClr val="FAF8F5"/>
+            <a:srgbClr val="FBFAF8"/>
           </a:solidFill>
           <a:ln>
             <a:noFill/>
@@ -4040,8 +3752,8 @@
         </p:nvSpPr>
         <p:spPr>
           <a:xfrm>
-            <a:off x="822960" y="777240"/>
-            <a:ext cx="10545775" cy="1234440"/>
+            <a:off x="822960" y="868680"/>
+            <a:ext cx="10545775" cy="1005840"/>
           </a:xfrm>
           <a:prstGeom prst="rect">
             <a:avLst/>
@@ -4056,19 +3768,16 @@
           <a:p>
             <a:pPr algn="ctr">
               <a:lnSpc>
-                <a:spcPct val="110000"/>
+                <a:spcPct val="115000"/>
               </a:lnSpc>
-              <a:spcBef>
-                <a:spcPts val="0"/>
-              </a:spcBef>
               <a:spcAft>
                 <a:spcPts val="0"/>
               </a:spcAft>
             </a:pPr>
             <a:r>
-              <a:rPr sz="3400" b="1">
+              <a:rPr sz="4000" b="1">
                 <a:solidFill>
-                  <a:srgbClr val="1C1B19"/>
+                  <a:srgbClr val="17181A"/>
                 </a:solidFill>
                 <a:latin typeface="Arial"/>
               </a:rPr>
@@ -4085,14 +3794,14 @@
         </p:nvSpPr>
         <p:spPr>
           <a:xfrm>
-            <a:off x="5410047" y="2084831"/>
-            <a:ext cx="1371600" cy="41148"/>
+            <a:off x="5547207" y="1965960"/>
+            <a:ext cx="1097280" cy="50800"/>
           </a:xfrm>
           <a:prstGeom prst="rect">
             <a:avLst/>
           </a:prstGeom>
           <a:solidFill>
-            <a:srgbClr val="C2472F"/>
+            <a:srgbClr val="B4531F"/>
           </a:solidFill>
           <a:ln>
             <a:noFill/>
@@ -4123,27 +3832,107 @@
       </p:sp>
       <p:sp>
         <p:nvSpPr>
-          <p:cNvPr id="5" name="Rounded Rectangle 4"/>
+          <p:cNvPr id="5" name="TextBox 4"/>
+          <p:cNvSpPr txBox="1"/>
+          <p:nvPr/>
+        </p:nvSpPr>
+        <p:spPr>
+          <a:xfrm>
+            <a:off x="822960" y="2606040"/>
+            <a:ext cx="3210458" cy="548640"/>
+          </a:xfrm>
+          <a:prstGeom prst="rect">
+            <a:avLst/>
+          </a:prstGeom>
+          <a:noFill/>
+        </p:spPr>
+        <p:txBody>
+          <a:bodyPr wrap="square" anchor="t" lIns="0" rIns="0" tIns="0" bIns="0">
+            <a:spAutoFit/>
+          </a:bodyPr>
+          <a:lstStyle/>
+          <a:p>
+            <a:pPr algn="l">
+              <a:lnSpc>
+                <a:spcPct val="115000"/>
+              </a:lnSpc>
+              <a:spcAft>
+                <a:spcPts val="0"/>
+              </a:spcAft>
+            </a:pPr>
+            <a:r>
+              <a:rPr sz="3000" b="1">
+                <a:solidFill>
+                  <a:srgbClr val="B4531F"/>
+                </a:solidFill>
+                <a:latin typeface="Arial"/>
+              </a:rPr>
+              <a:t>01</a:t>
+            </a:r>
+          </a:p>
+        </p:txBody>
+      </p:sp>
+      <p:sp>
+        <p:nvSpPr>
+          <p:cNvPr id="6" name="TextBox 5"/>
+          <p:cNvSpPr txBox="1"/>
+          <p:nvPr/>
+        </p:nvSpPr>
+        <p:spPr>
+          <a:xfrm>
+            <a:off x="822960" y="3172968"/>
+            <a:ext cx="3210458" cy="411480"/>
+          </a:xfrm>
+          <a:prstGeom prst="rect">
+            <a:avLst/>
+          </a:prstGeom>
+          <a:noFill/>
+        </p:spPr>
+        <p:txBody>
+          <a:bodyPr wrap="square" anchor="t" lIns="0" rIns="0" tIns="0" bIns="0">
+            <a:spAutoFit/>
+          </a:bodyPr>
+          <a:lstStyle/>
+          <a:p>
+            <a:pPr algn="l">
+              <a:lnSpc>
+                <a:spcPct val="115000"/>
+              </a:lnSpc>
+              <a:spcAft>
+                <a:spcPts val="0"/>
+              </a:spcAft>
+            </a:pPr>
+            <a:r>
+              <a:rPr sz="2000" b="1">
+                <a:solidFill>
+                  <a:srgbClr val="17181A"/>
+                </a:solidFill>
+                <a:latin typeface="Arial"/>
+              </a:rPr>
+              <a:t>Run it</a:t>
+            </a:r>
+          </a:p>
+        </p:txBody>
+      </p:sp>
+      <p:sp>
+        <p:nvSpPr>
+          <p:cNvPr id="7" name="Rounded Rectangle 6"/>
           <p:cNvSpPr/>
           <p:nvPr/>
         </p:nvSpPr>
         <p:spPr>
           <a:xfrm>
-            <a:off x="822960" y="2697480"/>
-            <a:ext cx="3210458" cy="2514600"/>
+            <a:off x="822960" y="3703320"/>
+            <a:ext cx="3210458" cy="1005840"/>
           </a:xfrm>
           <a:prstGeom prst="roundRect">
-            <a:avLst>
-              <a:gd name="adj" fmla="val 4000"/>
-            </a:avLst>
+            <a:avLst/>
           </a:prstGeom>
           <a:solidFill>
-            <a:srgbClr val="FFFFFF"/>
+            <a:srgbClr val="F1EDE7"/>
           </a:solidFill>
-          <a:ln w="12700">
-            <a:solidFill>
-              <a:srgbClr val="E2DDD5"/>
-            </a:solidFill>
+          <a:ln>
+            <a:noFill/>
           </a:ln>
           <a:effectLst/>
         </p:spPr>
@@ -4162,23 +3951,39 @@
           </a:fontRef>
         </p:style>
         <p:txBody>
-          <a:bodyPr rtlCol="0" anchor="ctr"/>
-          <a:lstStyle/>
-          <a:p>
-            <a:pPr algn="ctr"/>
-          </a:p>
-        </p:txBody>
-      </p:sp>
-      <p:sp>
-        <p:nvSpPr>
-          <p:cNvPr id="6" name="TextBox 5"/>
+          <a:bodyPr rtlCol="0" anchor="ctr" wrap="square" lIns="164592" rIns="164592"/>
+          <a:lstStyle/>
+          <a:p>
+            <a:pPr algn="l">
+              <a:lnSpc>
+                <a:spcPct val="115000"/>
+              </a:lnSpc>
+              <a:spcAft>
+                <a:spcPts val="0"/>
+              </a:spcAft>
+            </a:pPr>
+            <a:r>
+              <a:rPr sz="1600" b="0">
+                <a:solidFill>
+                  <a:srgbClr val="B4531F"/>
+                </a:solidFill>
+                <a:latin typeface="Consolas"/>
+              </a:rPr>
+              <a:t>marrow watch -- &lt;your test cmd&gt;</a:t>
+            </a:r>
+          </a:p>
+        </p:txBody>
+      </p:sp>
+      <p:sp>
+        <p:nvSpPr>
+          <p:cNvPr id="8" name="TextBox 7"/>
           <p:cNvSpPr txBox="1"/>
           <p:nvPr/>
         </p:nvSpPr>
         <p:spPr>
           <a:xfrm>
-            <a:off x="1188720" y="3063240"/>
-            <a:ext cx="2478938" cy="411480"/>
+            <a:off x="4490618" y="2606040"/>
+            <a:ext cx="3210458" cy="548640"/>
           </a:xfrm>
           <a:prstGeom prst="rect">
             <a:avLst/>
@@ -4192,35 +3997,35 @@
           <a:lstStyle/>
           <a:p>
             <a:pPr algn="l">
-              <a:spcBef>
-                <a:spcPts val="0"/>
-              </a:spcBef>
+              <a:lnSpc>
+                <a:spcPct val="115000"/>
+              </a:lnSpc>
               <a:spcAft>
                 <a:spcPts val="0"/>
               </a:spcAft>
             </a:pPr>
             <a:r>
-              <a:rPr sz="1500" b="1">
+              <a:rPr sz="3000" b="1">
                 <a:solidFill>
-                  <a:srgbClr val="C2472F"/>
+                  <a:srgbClr val="B4531F"/>
                 </a:solidFill>
                 <a:latin typeface="Arial"/>
               </a:rPr>
-              <a:t>01</a:t>
-            </a:r>
-          </a:p>
-        </p:txBody>
-      </p:sp>
-      <p:sp>
-        <p:nvSpPr>
-          <p:cNvPr id="7" name="TextBox 6"/>
+              <a:t>02</a:t>
+            </a:r>
+          </a:p>
+        </p:txBody>
+      </p:sp>
+      <p:sp>
+        <p:nvSpPr>
+          <p:cNvPr id="9" name="TextBox 8"/>
           <p:cNvSpPr txBox="1"/>
           <p:nvPr/>
         </p:nvSpPr>
         <p:spPr>
           <a:xfrm>
-            <a:off x="1188720" y="3657600"/>
-            <a:ext cx="2478938" cy="1371600"/>
+            <a:off x="4490618" y="3172968"/>
+            <a:ext cx="3210458" cy="411480"/>
           </a:xfrm>
           <a:prstGeom prst="rect">
             <a:avLst/>
@@ -4235,88 +4040,34 @@
           <a:p>
             <a:pPr algn="l">
               <a:lnSpc>
-                <a:spcPct val="130000"/>
+                <a:spcPct val="115000"/>
               </a:lnSpc>
+              <a:spcAft>
+                <a:spcPts val="0"/>
+              </a:spcAft>
             </a:pPr>
             <a:r>
-              <a:rPr sz="1600">
+              <a:rPr sz="2000" b="1">
                 <a:solidFill>
-                  <a:srgbClr val="1C1B19"/>
+                  <a:srgbClr val="17181A"/>
                 </a:solidFill>
                 <a:latin typeface="Arial"/>
               </a:rPr>
-              <a:t>Run </a:t>
-            </a:r>
-            <a:r>
-              <a:rPr sz="1600">
-                <a:solidFill>
-                  <a:srgbClr val="C2472F"/>
-                </a:solidFill>
-                <a:latin typeface="Consolas"/>
-              </a:rPr>
-              <a:t>marrow watch -- &lt;your test cmd&gt;</a:t>
-            </a:r>
-          </a:p>
-        </p:txBody>
-      </p:sp>
-      <p:sp>
-        <p:nvSpPr>
-          <p:cNvPr id="8" name="Rounded Rectangle 7"/>
-          <p:cNvSpPr/>
-          <p:nvPr/>
-        </p:nvSpPr>
-        <p:spPr>
-          <a:xfrm>
-            <a:off x="4490618" y="2697480"/>
-            <a:ext cx="3210458" cy="2514600"/>
-          </a:xfrm>
-          <a:prstGeom prst="roundRect">
-            <a:avLst>
-              <a:gd name="adj" fmla="val 4000"/>
-            </a:avLst>
-          </a:prstGeom>
-          <a:solidFill>
-            <a:srgbClr val="FFFFFF"/>
-          </a:solidFill>
-          <a:ln w="12700">
-            <a:solidFill>
-              <a:srgbClr val="E2DDD5"/>
-            </a:solidFill>
-          </a:ln>
-          <a:effectLst/>
-        </p:spPr>
-        <p:style>
-          <a:lnRef idx="1">
-            <a:schemeClr val="accent1"/>
-          </a:lnRef>
-          <a:fillRef idx="3">
-            <a:schemeClr val="accent1"/>
-          </a:fillRef>
-          <a:effectRef idx="2">
-            <a:schemeClr val="accent1"/>
-          </a:effectRef>
-          <a:fontRef idx="minor">
-            <a:schemeClr val="lt1"/>
-          </a:fontRef>
-        </p:style>
-        <p:txBody>
-          <a:bodyPr rtlCol="0" anchor="ctr"/>
-          <a:lstStyle/>
-          <a:p>
-            <a:pPr algn="ctr"/>
-          </a:p>
-        </p:txBody>
-      </p:sp>
-      <p:sp>
-        <p:nvSpPr>
-          <p:cNvPr id="9" name="TextBox 8"/>
+              <a:t>It records</a:t>
+            </a:r>
+          </a:p>
+        </p:txBody>
+      </p:sp>
+      <p:sp>
+        <p:nvSpPr>
+          <p:cNvPr id="10" name="TextBox 9"/>
           <p:cNvSpPr txBox="1"/>
           <p:nvPr/>
         </p:nvSpPr>
         <p:spPr>
           <a:xfrm>
-            <a:off x="4856378" y="3063240"/>
-            <a:ext cx="2478938" cy="411480"/>
+            <a:off x="4490618" y="3703320"/>
+            <a:ext cx="3210458" cy="1645920"/>
           </a:xfrm>
           <a:prstGeom prst="rect">
             <a:avLst/>
@@ -4330,35 +4081,35 @@
           <a:lstStyle/>
           <a:p>
             <a:pPr algn="l">
-              <a:spcBef>
-                <a:spcPts val="0"/>
-              </a:spcBef>
+              <a:lnSpc>
+                <a:spcPct val="135000"/>
+              </a:lnSpc>
               <a:spcAft>
                 <a:spcPts val="0"/>
               </a:spcAft>
             </a:pPr>
             <a:r>
-              <a:rPr sz="1500" b="1">
+              <a:rPr sz="1600" b="0">
                 <a:solidFill>
-                  <a:srgbClr val="C2472F"/>
+                  <a:srgbClr val="5F6368"/>
                 </a:solidFill>
                 <a:latin typeface="Arial"/>
               </a:rPr>
-              <a:t>02</a:t>
-            </a:r>
-          </a:p>
-        </p:txBody>
-      </p:sp>
-      <p:sp>
-        <p:nvSpPr>
-          <p:cNvPr id="10" name="TextBox 9"/>
+              <a:t>Marrow records which lines each test exercised.</a:t>
+            </a:r>
+          </a:p>
+        </p:txBody>
+      </p:sp>
+      <p:sp>
+        <p:nvSpPr>
+          <p:cNvPr id="11" name="TextBox 10"/>
           <p:cNvSpPr txBox="1"/>
           <p:nvPr/>
         </p:nvSpPr>
         <p:spPr>
           <a:xfrm>
-            <a:off x="4856378" y="3657600"/>
-            <a:ext cx="2478938" cy="1371600"/>
+            <a:off x="8158276" y="2606040"/>
+            <a:ext cx="3210458" cy="548640"/>
           </a:xfrm>
           <a:prstGeom prst="rect">
             <a:avLst/>
@@ -4373,66 +4124,21 @@
           <a:p>
             <a:pPr algn="l">
               <a:lnSpc>
-                <a:spcPct val="130000"/>
+                <a:spcPct val="115000"/>
               </a:lnSpc>
+              <a:spcAft>
+                <a:spcPts val="0"/>
+              </a:spcAft>
             </a:pPr>
             <a:r>
-              <a:rPr sz="1600">
+              <a:rPr sz="3000" b="1">
                 <a:solidFill>
-                  <a:srgbClr val="1C1B19"/>
+                  <a:srgbClr val="B4531F"/>
                 </a:solidFill>
                 <a:latin typeface="Arial"/>
               </a:rPr>
-              <a:t>Marrow records which lines each test exercised.</a:t>
-            </a:r>
-          </a:p>
-        </p:txBody>
-      </p:sp>
-      <p:sp>
-        <p:nvSpPr>
-          <p:cNvPr id="11" name="Rounded Rectangle 10"/>
-          <p:cNvSpPr/>
-          <p:nvPr/>
-        </p:nvSpPr>
-        <p:spPr>
-          <a:xfrm>
-            <a:off x="8158276" y="2697480"/>
-            <a:ext cx="3210458" cy="2514600"/>
-          </a:xfrm>
-          <a:prstGeom prst="roundRect">
-            <a:avLst>
-              <a:gd name="adj" fmla="val 4000"/>
-            </a:avLst>
-          </a:prstGeom>
-          <a:solidFill>
-            <a:srgbClr val="FFFFFF"/>
-          </a:solidFill>
-          <a:ln w="12700">
-            <a:solidFill>
-              <a:srgbClr val="E2DDD5"/>
-            </a:solidFill>
-          </a:ln>
-          <a:effectLst/>
-        </p:spPr>
-        <p:style>
-          <a:lnRef idx="1">
-            <a:schemeClr val="accent1"/>
-          </a:lnRef>
-          <a:fillRef idx="3">
-            <a:schemeClr val="accent1"/>
-          </a:fillRef>
-          <a:effectRef idx="2">
-            <a:schemeClr val="accent1"/>
-          </a:effectRef>
-          <a:fontRef idx="minor">
-            <a:schemeClr val="lt1"/>
-          </a:fontRef>
-        </p:style>
-        <p:txBody>
-          <a:bodyPr rtlCol="0" anchor="ctr"/>
-          <a:lstStyle/>
-          <a:p>
-            <a:pPr algn="ctr"/>
+              <a:t>03</a:t>
+            </a:r>
           </a:p>
         </p:txBody>
       </p:sp>
@@ -4444,8 +4150,8 @@
         </p:nvSpPr>
         <p:spPr>
           <a:xfrm>
-            <a:off x="8524036" y="3063240"/>
-            <a:ext cx="2478938" cy="411480"/>
+            <a:off x="8158276" y="3172968"/>
+            <a:ext cx="3210458" cy="411480"/>
           </a:xfrm>
           <a:prstGeom prst="rect">
             <a:avLst/>
@@ -4459,21 +4165,21 @@
           <a:lstStyle/>
           <a:p>
             <a:pPr algn="l">
-              <a:spcBef>
-                <a:spcPts val="0"/>
-              </a:spcBef>
+              <a:lnSpc>
+                <a:spcPct val="115000"/>
+              </a:lnSpc>
               <a:spcAft>
                 <a:spcPts val="0"/>
               </a:spcAft>
             </a:pPr>
             <a:r>
-              <a:rPr sz="1500" b="1">
+              <a:rPr sz="2000" b="1">
                 <a:solidFill>
-                  <a:srgbClr val="C2472F"/>
+                  <a:srgbClr val="17181A"/>
                 </a:solidFill>
                 <a:latin typeface="Arial"/>
               </a:rPr>
-              <a:t>03</a:t>
+              <a:t>It maps</a:t>
             </a:r>
           </a:p>
         </p:txBody>
@@ -4486,8 +4192,8 @@
         </p:nvSpPr>
         <p:spPr>
           <a:xfrm>
-            <a:off x="8524036" y="3657600"/>
-            <a:ext cx="2478938" cy="1371600"/>
+            <a:off x="8158276" y="3703320"/>
+            <a:ext cx="3210458" cy="1645920"/>
           </a:xfrm>
           <a:prstGeom prst="rect">
             <a:avLst/>
@@ -4502,101 +4208,20 @@
           <a:p>
             <a:pPr algn="l">
               <a:lnSpc>
-                <a:spcPct val="130000"/>
+                <a:spcPct val="135000"/>
               </a:lnSpc>
-            </a:pPr>
-            <a:r>
-              <a:rPr sz="1600">
-                <a:solidFill>
-                  <a:srgbClr val="1C1B19"/>
-                </a:solidFill>
-                <a:latin typeface="Arial"/>
-              </a:rPr>
-              <a:t>It emits an interactive map, plus a list of dead tests and untested lines.</a:t>
-            </a:r>
-          </a:p>
-        </p:txBody>
-      </p:sp>
-      <p:sp>
-        <p:nvSpPr>
-          <p:cNvPr id="14" name="TextBox 13"/>
-          <p:cNvSpPr txBox="1"/>
-          <p:nvPr/>
-        </p:nvSpPr>
-        <p:spPr>
-          <a:xfrm>
-            <a:off x="822960" y="6144768"/>
-            <a:ext cx="2743200" cy="274320"/>
-          </a:xfrm>
-          <a:prstGeom prst="rect">
-            <a:avLst/>
-          </a:prstGeom>
-          <a:noFill/>
-        </p:spPr>
-        <p:txBody>
-          <a:bodyPr wrap="square" anchor="t" lIns="0" rIns="0" tIns="0" bIns="0">
-            <a:spAutoFit/>
-          </a:bodyPr>
-          <a:lstStyle/>
-          <a:p>
-            <a:pPr algn="l">
-              <a:spcBef>
-                <a:spcPts val="0"/>
-              </a:spcBef>
               <a:spcAft>
                 <a:spcPts val="0"/>
               </a:spcAft>
             </a:pPr>
             <a:r>
-              <a:rPr sz="1000" b="0">
+              <a:rPr sz="1600" b="0">
                 <a:solidFill>
-                  <a:srgbClr val="6B665F"/>
+                  <a:srgbClr val="5F6368"/>
                 </a:solidFill>
                 <a:latin typeface="Arial"/>
               </a:rPr>
-              <a:t>Marrow</a:t>
-            </a:r>
-          </a:p>
-        </p:txBody>
-      </p:sp>
-      <p:sp>
-        <p:nvSpPr>
-          <p:cNvPr id="15" name="TextBox 14"/>
-          <p:cNvSpPr txBox="1"/>
-          <p:nvPr/>
-        </p:nvSpPr>
-        <p:spPr>
-          <a:xfrm>
-            <a:off x="8625535" y="6144768"/>
-            <a:ext cx="2743200" cy="274320"/>
-          </a:xfrm>
-          <a:prstGeom prst="rect">
-            <a:avLst/>
-          </a:prstGeom>
-          <a:noFill/>
-        </p:spPr>
-        <p:txBody>
-          <a:bodyPr wrap="square" anchor="t" lIns="0" rIns="0" tIns="0" bIns="0">
-            <a:spAutoFit/>
-          </a:bodyPr>
-          <a:lstStyle/>
-          <a:p>
-            <a:pPr algn="r">
-              <a:spcBef>
-                <a:spcPts val="0"/>
-              </a:spcBef>
-              <a:spcAft>
-                <a:spcPts val="0"/>
-              </a:spcAft>
-            </a:pPr>
-            <a:r>
-              <a:rPr sz="1000" b="0">
-                <a:solidFill>
-                  <a:srgbClr val="6B665F"/>
-                </a:solidFill>
-                <a:latin typeface="Arial"/>
-              </a:rPr>
-              <a:t>4</a:t>
+              <a:t>You get an interactive map, plus a list of dead tests and untested lines.</a:t>
             </a:r>
           </a:p>
         </p:txBody>
@@ -4634,7 +4259,7 @@
             <a:avLst/>
           </a:prstGeom>
           <a:solidFill>
-            <a:srgbClr val="FAF8F5"/>
+            <a:srgbClr val="FBFAF8"/>
           </a:solidFill>
           <a:ln>
             <a:noFill/>
@@ -4671,8 +4296,8 @@
         </p:nvSpPr>
         <p:spPr>
           <a:xfrm>
-            <a:off x="822960" y="777240"/>
-            <a:ext cx="10545775" cy="1234440"/>
+            <a:off x="822960" y="868680"/>
+            <a:ext cx="10545775" cy="1005840"/>
           </a:xfrm>
           <a:prstGeom prst="rect">
             <a:avLst/>
@@ -4687,19 +4312,16 @@
           <a:p>
             <a:pPr algn="ctr">
               <a:lnSpc>
-                <a:spcPct val="110000"/>
+                <a:spcPct val="115000"/>
               </a:lnSpc>
-              <a:spcBef>
-                <a:spcPts val="0"/>
-              </a:spcBef>
               <a:spcAft>
                 <a:spcPts val="0"/>
               </a:spcAft>
             </a:pPr>
             <a:r>
-              <a:rPr sz="3400" b="1">
+              <a:rPr sz="4000" b="1">
                 <a:solidFill>
-                  <a:srgbClr val="1C1B19"/>
+                  <a:srgbClr val="17181A"/>
                 </a:solidFill>
                 <a:latin typeface="Arial"/>
               </a:rPr>
@@ -4716,14 +4338,14 @@
         </p:nvSpPr>
         <p:spPr>
           <a:xfrm>
-            <a:off x="5410047" y="2084831"/>
-            <a:ext cx="1371600" cy="41148"/>
+            <a:off x="5547207" y="1965960"/>
+            <a:ext cx="1097280" cy="50800"/>
           </a:xfrm>
           <a:prstGeom prst="rect">
             <a:avLst/>
           </a:prstGeom>
           <a:solidFill>
-            <a:srgbClr val="C2472F"/>
+            <a:srgbClr val="B4531F"/>
           </a:solidFill>
           <a:ln>
             <a:noFill/>
@@ -4760,21 +4382,17 @@
         </p:nvSpPr>
         <p:spPr>
           <a:xfrm>
-            <a:off x="3626967" y="2880360"/>
-            <a:ext cx="4937760" cy="1051560"/>
+            <a:off x="3718407" y="2606040"/>
+            <a:ext cx="4754880" cy="914400"/>
           </a:xfrm>
           <a:prstGeom prst="roundRect">
-            <a:avLst>
-              <a:gd name="adj" fmla="val 16000"/>
-            </a:avLst>
+            <a:avLst/>
           </a:prstGeom>
           <a:solidFill>
-            <a:srgbClr val="FFFFFF"/>
+            <a:srgbClr val="F1EDE7"/>
           </a:solidFill>
-          <a:ln w="15875">
-            <a:solidFill>
-              <a:srgbClr val="C2472F"/>
-            </a:solidFill>
+          <a:ln>
+            <a:noFill/>
           </a:ln>
           <a:effectLst/>
         </p:spPr>
@@ -4793,13 +4411,13 @@
           </a:fontRef>
         </p:style>
         <p:txBody>
-          <a:bodyPr rtlCol="0" anchor="ctr" wrap="square"/>
+          <a:bodyPr rtlCol="0" anchor="ctr"/>
           <a:lstStyle/>
           <a:p>
             <a:pPr algn="ctr">
-              <a:spcBef>
-                <a:spcPts val="0"/>
-              </a:spcBef>
+              <a:lnSpc>
+                <a:spcPct val="115000"/>
+              </a:lnSpc>
               <a:spcAft>
                 <a:spcPts val="0"/>
               </a:spcAft>
@@ -4807,7 +4425,7 @@
             <a:r>
               <a:rPr sz="2800" b="1">
                 <a:solidFill>
-                  <a:srgbClr val="1C1B19"/>
+                  <a:srgbClr val="B4531F"/>
                 </a:solidFill>
                 <a:latin typeface="Consolas"/>
               </a:rPr>
@@ -4824,8 +4442,8 @@
         </p:nvSpPr>
         <p:spPr>
           <a:xfrm>
-            <a:off x="822960" y="4315968"/>
-            <a:ext cx="10545775" cy="457200"/>
+            <a:off x="822960" y="3977640"/>
+            <a:ext cx="10545775" cy="548640"/>
           </a:xfrm>
           <a:prstGeom prst="rect">
             <a:avLst/>
@@ -4839,105 +4457,21 @@
           <a:lstStyle/>
           <a:p>
             <a:pPr algn="ctr">
-              <a:spcBef>
-                <a:spcPts val="0"/>
-              </a:spcBef>
+              <a:lnSpc>
+                <a:spcPct val="115000"/>
+              </a:lnSpc>
               <a:spcAft>
                 <a:spcPts val="0"/>
               </a:spcAft>
             </a:pPr>
             <a:r>
-              <a:rPr sz="2200" b="0">
+              <a:rPr sz="2400" b="0">
                 <a:solidFill>
-                  <a:srgbClr val="6B665F"/>
+                  <a:srgbClr val="5F6368"/>
                 </a:solidFill>
                 <a:latin typeface="Arial"/>
               </a:rPr>
               <a:t>Works with pytest, Jest, go test.</a:t>
-            </a:r>
-          </a:p>
-        </p:txBody>
-      </p:sp>
-      <p:sp>
-        <p:nvSpPr>
-          <p:cNvPr id="7" name="TextBox 6"/>
-          <p:cNvSpPr txBox="1"/>
-          <p:nvPr/>
-        </p:nvSpPr>
-        <p:spPr>
-          <a:xfrm>
-            <a:off x="822960" y="6144768"/>
-            <a:ext cx="2743200" cy="274320"/>
-          </a:xfrm>
-          <a:prstGeom prst="rect">
-            <a:avLst/>
-          </a:prstGeom>
-          <a:noFill/>
-        </p:spPr>
-        <p:txBody>
-          <a:bodyPr wrap="square" anchor="t" lIns="0" rIns="0" tIns="0" bIns="0">
-            <a:spAutoFit/>
-          </a:bodyPr>
-          <a:lstStyle/>
-          <a:p>
-            <a:pPr algn="l">
-              <a:spcBef>
-                <a:spcPts val="0"/>
-              </a:spcBef>
-              <a:spcAft>
-                <a:spcPts val="0"/>
-              </a:spcAft>
-            </a:pPr>
-            <a:r>
-              <a:rPr sz="1000" b="0">
-                <a:solidFill>
-                  <a:srgbClr val="6B665F"/>
-                </a:solidFill>
-                <a:latin typeface="Arial"/>
-              </a:rPr>
-              <a:t>Marrow</a:t>
-            </a:r>
-          </a:p>
-        </p:txBody>
-      </p:sp>
-      <p:sp>
-        <p:nvSpPr>
-          <p:cNvPr id="8" name="TextBox 7"/>
-          <p:cNvSpPr txBox="1"/>
-          <p:nvPr/>
-        </p:nvSpPr>
-        <p:spPr>
-          <a:xfrm>
-            <a:off x="8625535" y="6144768"/>
-            <a:ext cx="2743200" cy="274320"/>
-          </a:xfrm>
-          <a:prstGeom prst="rect">
-            <a:avLst/>
-          </a:prstGeom>
-          <a:noFill/>
-        </p:spPr>
-        <p:txBody>
-          <a:bodyPr wrap="square" anchor="t" lIns="0" rIns="0" tIns="0" bIns="0">
-            <a:spAutoFit/>
-          </a:bodyPr>
-          <a:lstStyle/>
-          <a:p>
-            <a:pPr algn="r">
-              <a:spcBef>
-                <a:spcPts val="0"/>
-              </a:spcBef>
-              <a:spcAft>
-                <a:spcPts val="0"/>
-              </a:spcAft>
-            </a:pPr>
-            <a:r>
-              <a:rPr sz="1000" b="0">
-                <a:solidFill>
-                  <a:srgbClr val="6B665F"/>
-                </a:solidFill>
-                <a:latin typeface="Arial"/>
-              </a:rPr>
-              <a:t>5</a:t>
             </a:r>
           </a:p>
         </p:txBody>
